--- a/Projeto de Software e Segurança da Informação - 2026/Projeto de Software/Aula12-Spring Boot/Aula Inaugural - 10 grupos.pptx
+++ b/Projeto de Software e Segurança da Informação - 2026/Projeto de Software/Aula12-Spring Boot/Aula Inaugural - 10 grupos.pptx
@@ -5,15 +5,25 @@
     <p:sldMasterId id="2147483677" r:id="rId4"/>
   </p:sldMasterIdLst>
   <p:notesMasterIdLst>
-    <p:notesMasterId r:id="rId8"/>
+    <p:notesMasterId r:id="rId18"/>
   </p:notesMasterIdLst>
   <p:handoutMasterIdLst>
-    <p:handoutMasterId r:id="rId9"/>
+    <p:handoutMasterId r:id="rId19"/>
   </p:handoutMasterIdLst>
   <p:sldIdLst>
     <p:sldId id="256" r:id="rId5"/>
     <p:sldId id="257" r:id="rId6"/>
     <p:sldId id="258" r:id="rId7"/>
+    <p:sldId id="259" r:id="rId8"/>
+    <p:sldId id="260" r:id="rId9"/>
+    <p:sldId id="261" r:id="rId10"/>
+    <p:sldId id="262" r:id="rId11"/>
+    <p:sldId id="263" r:id="rId12"/>
+    <p:sldId id="264" r:id="rId13"/>
+    <p:sldId id="266" r:id="rId14"/>
+    <p:sldId id="267" r:id="rId15"/>
+    <p:sldId id="268" r:id="rId16"/>
+    <p:sldId id="265" r:id="rId17"/>
   </p:sldIdLst>
   <p:sldSz cx="12192000" cy="6858000"/>
   <p:notesSz cx="6858000" cy="9144000"/>
@@ -3987,6 +3997,721 @@
 </p:sld>
 </file>
 
+<file path=ppt/slides/slide10.xml><?xml version="1.0" encoding="utf-8"?>
+<p:sld xmlns:a="http://schemas.openxmlformats.org/drawingml/2006/main" xmlns:r="http://schemas.openxmlformats.org/officeDocument/2006/relationships" xmlns:p="http://schemas.openxmlformats.org/presentationml/2006/main">
+  <p:cSld>
+    <p:spTree>
+      <p:nvGrpSpPr>
+        <p:cNvPr id="1" name="">
+          <a:extLst>
+            <a:ext uri="{FF2B5EF4-FFF2-40B4-BE49-F238E27FC236}">
+              <a16:creationId xmlns:a16="http://schemas.microsoft.com/office/drawing/2014/main" id="{79A4F96D-B95B-7AC8-76E8-0AF6C8ABC1A7}"/>
+            </a:ext>
+          </a:extLst>
+        </p:cNvPr>
+        <p:cNvGrpSpPr/>
+        <p:nvPr/>
+      </p:nvGrpSpPr>
+      <p:grpSpPr>
+        <a:xfrm>
+          <a:off x="0" y="0"/>
+          <a:ext cx="0" cy="0"/>
+          <a:chOff x="0" y="0"/>
+          <a:chExt cx="0" cy="0"/>
+        </a:xfrm>
+      </p:grpSpPr>
+      <p:sp>
+        <p:nvSpPr>
+          <p:cNvPr id="2" name="Título 1">
+            <a:extLst>
+              <a:ext uri="{FF2B5EF4-FFF2-40B4-BE49-F238E27FC236}">
+                <a16:creationId xmlns:a16="http://schemas.microsoft.com/office/drawing/2014/main" id="{869D4EE8-4655-D130-F6D3-325EC3F761C4}"/>
+              </a:ext>
+            </a:extLst>
+          </p:cNvPr>
+          <p:cNvSpPr>
+            <a:spLocks noGrp="1"/>
+          </p:cNvSpPr>
+          <p:nvPr>
+            <p:ph type="title"/>
+          </p:nvPr>
+        </p:nvSpPr>
+        <p:spPr/>
+        <p:txBody>
+          <a:bodyPr/>
+          <a:lstStyle/>
+          <a:p>
+            <a:r>
+              <a:rPr lang="pt-BR" dirty="0"/>
+              <a:t>Cabeçalho de requisição do Protocolo HTTP</a:t>
+            </a:r>
+          </a:p>
+        </p:txBody>
+      </p:sp>
+      <p:sp>
+        <p:nvSpPr>
+          <p:cNvPr id="3" name="Espaço Reservado para Conteúdo 2">
+            <a:extLst>
+              <a:ext uri="{FF2B5EF4-FFF2-40B4-BE49-F238E27FC236}">
+                <a16:creationId xmlns:a16="http://schemas.microsoft.com/office/drawing/2014/main" id="{752A3B51-2CCB-2472-8C78-1590F7B568F7}"/>
+              </a:ext>
+            </a:extLst>
+          </p:cNvPr>
+          <p:cNvSpPr>
+            <a:spLocks noGrp="1"/>
+          </p:cNvSpPr>
+          <p:nvPr>
+            <p:ph idx="1"/>
+          </p:nvPr>
+        </p:nvSpPr>
+        <p:spPr>
+          <a:xfrm>
+            <a:off x="592347" y="1844674"/>
+            <a:ext cx="11007306" cy="4491958"/>
+          </a:xfrm>
+        </p:spPr>
+        <p:txBody>
+          <a:bodyPr/>
+          <a:lstStyle/>
+          <a:p>
+            <a:r>
+              <a:rPr lang="pt-BR" dirty="0"/>
+              <a:t>Para que serve cada campo:</a:t>
+            </a:r>
+          </a:p>
+          <a:p>
+            <a:pPr marL="1028700" lvl="1" indent="-342900" algn="just">
+              <a:spcAft>
+                <a:spcPts val="500"/>
+              </a:spcAft>
+            </a:pPr>
+            <a:r>
+              <a:rPr lang="pt-BR" b="1" dirty="0"/>
+              <a:t>Método </a:t>
+            </a:r>
+            <a:r>
+              <a:rPr lang="pt-BR" dirty="0"/>
+              <a:t>→ Define qual método será utilizado, como por exemplo o método POST.</a:t>
+            </a:r>
+          </a:p>
+          <a:p>
+            <a:pPr marL="1028700" lvl="1" indent="-342900" algn="just">
+              <a:spcAft>
+                <a:spcPts val="500"/>
+              </a:spcAft>
+            </a:pPr>
+            <a:r>
+              <a:rPr lang="pt-BR" b="1" dirty="0"/>
+              <a:t>URI </a:t>
+            </a:r>
+            <a:r>
+              <a:rPr lang="pt-BR" dirty="0"/>
+              <a:t>→ Define onde a requisição será aplicada no servidor.</a:t>
+            </a:r>
+          </a:p>
+          <a:p>
+            <a:pPr marL="1028700" lvl="1" indent="-342900" algn="just">
+              <a:spcAft>
+                <a:spcPts val="500"/>
+              </a:spcAft>
+            </a:pPr>
+            <a:r>
+              <a:rPr lang="pt-BR" b="1" dirty="0"/>
+              <a:t>Versão </a:t>
+            </a:r>
+            <a:r>
+              <a:rPr lang="pt-BR" dirty="0"/>
+              <a:t>→ Indica a versão do protocolo HTTP, como no exemplo a versão 1.1.</a:t>
+            </a:r>
+          </a:p>
+          <a:p>
+            <a:pPr marL="1028700" lvl="1" indent="-342900" algn="just">
+              <a:spcAft>
+                <a:spcPts val="500"/>
+              </a:spcAft>
+            </a:pPr>
+            <a:r>
+              <a:rPr lang="pt-BR" b="1" dirty="0"/>
+              <a:t>Host</a:t>
+            </a:r>
+            <a:r>
+              <a:rPr lang="pt-BR" dirty="0"/>
+              <a:t> → Informa o endereço do servidor que vai receber a requisição e a porta que será utilizada.</a:t>
+            </a:r>
+          </a:p>
+          <a:p>
+            <a:pPr marL="1028700" lvl="1" indent="-342900" algn="just">
+              <a:spcAft>
+                <a:spcPts val="500"/>
+              </a:spcAft>
+            </a:pPr>
+            <a:r>
+              <a:rPr lang="pt-BR" b="1" dirty="0"/>
+              <a:t>Connection</a:t>
+            </a:r>
+            <a:r>
+              <a:rPr lang="pt-BR" dirty="0"/>
+              <a:t> → Define se a conexão deve permanecer aberta, no </a:t>
+            </a:r>
+            <a:r>
+              <a:rPr lang="pt-BR" dirty="0" err="1"/>
+              <a:t>keep-alive</a:t>
+            </a:r>
+            <a:r>
+              <a:rPr lang="pt-BR" dirty="0"/>
+              <a:t> define que a conexão deve ser mantida aberta.</a:t>
+            </a:r>
+          </a:p>
+          <a:p>
+            <a:pPr marL="1028700" lvl="1" indent="-342900" algn="just">
+              <a:spcAft>
+                <a:spcPts val="500"/>
+              </a:spcAft>
+            </a:pPr>
+            <a:r>
+              <a:rPr lang="pt-BR" b="1" dirty="0" err="1"/>
+              <a:t>Content-Type</a:t>
+            </a:r>
+            <a:r>
+              <a:rPr lang="pt-BR" dirty="0"/>
+              <a:t> → Indica o tipo de dado enviado no corpo da requisição, como por exemplo o JSON.</a:t>
+            </a:r>
+          </a:p>
+          <a:p>
+            <a:pPr marL="1028700" lvl="1" indent="-342900" algn="just">
+              <a:spcAft>
+                <a:spcPts val="500"/>
+              </a:spcAft>
+            </a:pPr>
+            <a:r>
+              <a:rPr lang="pt-BR" b="1" dirty="0"/>
+              <a:t>Corpo (body) </a:t>
+            </a:r>
+            <a:r>
+              <a:rPr lang="pt-BR" dirty="0"/>
+              <a:t>→ Contém os </a:t>
+            </a:r>
+            <a:r>
+              <a:rPr lang="pt-BR" b="1" dirty="0"/>
+              <a:t>dados enviados para o servidor</a:t>
+            </a:r>
+            <a:r>
+              <a:rPr lang="pt-BR" dirty="0"/>
+              <a:t>.</a:t>
+            </a:r>
+          </a:p>
+          <a:p>
+            <a:pPr marL="1028700" lvl="1" indent="-342900" algn="just">
+              <a:spcAft>
+                <a:spcPts val="500"/>
+              </a:spcAft>
+            </a:pPr>
+            <a:endParaRPr lang="pt-BR" dirty="0"/>
+          </a:p>
+          <a:p>
+            <a:endParaRPr lang="pt-BR" dirty="0"/>
+          </a:p>
+          <a:p>
+            <a:endParaRPr lang="pt-BR" dirty="0"/>
+          </a:p>
+          <a:p>
+            <a:endParaRPr lang="pt-BR" dirty="0"/>
+          </a:p>
+        </p:txBody>
+      </p:sp>
+    </p:spTree>
+    <p:extLst>
+      <p:ext uri="{BB962C8B-B14F-4D97-AF65-F5344CB8AC3E}">
+        <p14:creationId xmlns:p14="http://schemas.microsoft.com/office/powerpoint/2010/main" val="3840912893"/>
+      </p:ext>
+    </p:extLst>
+  </p:cSld>
+  <p:clrMapOvr>
+    <a:masterClrMapping/>
+  </p:clrMapOvr>
+</p:sld>
+</file>
+
+<file path=ppt/slides/slide11.xml><?xml version="1.0" encoding="utf-8"?>
+<p:sld xmlns:a="http://schemas.openxmlformats.org/drawingml/2006/main" xmlns:r="http://schemas.openxmlformats.org/officeDocument/2006/relationships" xmlns:p="http://schemas.openxmlformats.org/presentationml/2006/main">
+  <p:cSld>
+    <p:spTree>
+      <p:nvGrpSpPr>
+        <p:cNvPr id="1" name="">
+          <a:extLst>
+            <a:ext uri="{FF2B5EF4-FFF2-40B4-BE49-F238E27FC236}">
+              <a16:creationId xmlns:a16="http://schemas.microsoft.com/office/drawing/2014/main" id="{B01F39E9-E8E0-9053-3501-97156C49E17B}"/>
+            </a:ext>
+          </a:extLst>
+        </p:cNvPr>
+        <p:cNvGrpSpPr/>
+        <p:nvPr/>
+      </p:nvGrpSpPr>
+      <p:grpSpPr>
+        <a:xfrm>
+          <a:off x="0" y="0"/>
+          <a:ext cx="0" cy="0"/>
+          <a:chOff x="0" y="0"/>
+          <a:chExt cx="0" cy="0"/>
+        </a:xfrm>
+      </p:grpSpPr>
+      <p:sp>
+        <p:nvSpPr>
+          <p:cNvPr id="2" name="Título 1">
+            <a:extLst>
+              <a:ext uri="{FF2B5EF4-FFF2-40B4-BE49-F238E27FC236}">
+                <a16:creationId xmlns:a16="http://schemas.microsoft.com/office/drawing/2014/main" id="{AA041239-0329-FF91-E7EB-0A7D5C249F5F}"/>
+              </a:ext>
+            </a:extLst>
+          </p:cNvPr>
+          <p:cNvSpPr>
+            <a:spLocks noGrp="1"/>
+          </p:cNvSpPr>
+          <p:nvPr>
+            <p:ph type="title"/>
+          </p:nvPr>
+        </p:nvSpPr>
+        <p:spPr/>
+        <p:txBody>
+          <a:bodyPr/>
+          <a:lstStyle/>
+          <a:p>
+            <a:r>
+              <a:rPr lang="pt-BR" dirty="0"/>
+              <a:t>Cabeçalho de requisição do Protocolo HTTP</a:t>
+            </a:r>
+          </a:p>
+        </p:txBody>
+      </p:sp>
+      <p:sp>
+        <p:nvSpPr>
+          <p:cNvPr id="3" name="Espaço Reservado para Conteúdo 2">
+            <a:extLst>
+              <a:ext uri="{FF2B5EF4-FFF2-40B4-BE49-F238E27FC236}">
+                <a16:creationId xmlns:a16="http://schemas.microsoft.com/office/drawing/2014/main" id="{D3758374-24F1-CB85-7CAC-D1A043B6FF53}"/>
+              </a:ext>
+            </a:extLst>
+          </p:cNvPr>
+          <p:cNvSpPr>
+            <a:spLocks noGrp="1"/>
+          </p:cNvSpPr>
+          <p:nvPr>
+            <p:ph idx="1"/>
+          </p:nvPr>
+        </p:nvSpPr>
+        <p:spPr>
+          <a:xfrm>
+            <a:off x="592347" y="1844675"/>
+            <a:ext cx="11007306" cy="1098550"/>
+          </a:xfrm>
+        </p:spPr>
+        <p:txBody>
+          <a:bodyPr/>
+          <a:lstStyle/>
+          <a:p>
+            <a:pPr algn="just"/>
+            <a:r>
+              <a:rPr lang="pt-BR" dirty="0"/>
+              <a:t>O cabeçalho da resposta no </a:t>
+            </a:r>
+            <a:r>
+              <a:rPr lang="pt-BR" b="1" dirty="0"/>
+              <a:t>HTTP</a:t>
+            </a:r>
+            <a:r>
+              <a:rPr lang="pt-BR" dirty="0"/>
+              <a:t> serve para informar ao cliente (navegador ou aplicação) como interpretar a resposta enviada pelo servidor.</a:t>
+            </a:r>
+          </a:p>
+          <a:p>
+            <a:endParaRPr lang="pt-BR" dirty="0"/>
+          </a:p>
+        </p:txBody>
+      </p:sp>
+      <p:pic>
+        <p:nvPicPr>
+          <p:cNvPr id="7170" name="Picture 2">
+            <a:extLst>
+              <a:ext uri="{FF2B5EF4-FFF2-40B4-BE49-F238E27FC236}">
+                <a16:creationId xmlns:a16="http://schemas.microsoft.com/office/drawing/2014/main" id="{6F33D559-0B61-2351-4435-EBD63B254AD3}"/>
+              </a:ext>
+            </a:extLst>
+          </p:cNvPr>
+          <p:cNvPicPr>
+            <a:picLocks noChangeAspect="1" noChangeArrowheads="1"/>
+          </p:cNvPicPr>
+          <p:nvPr/>
+        </p:nvPicPr>
+        <p:blipFill>
+          <a:blip r:embed="rId2">
+            <a:extLst>
+              <a:ext uri="{28A0092B-C50C-407E-A947-70E740481C1C}">
+                <a14:useLocalDpi xmlns:a14="http://schemas.microsoft.com/office/drawing/2010/main" val="0"/>
+              </a:ext>
+            </a:extLst>
+          </a:blip>
+          <a:srcRect/>
+          <a:stretch>
+            <a:fillRect/>
+          </a:stretch>
+        </p:blipFill>
+        <p:spPr bwMode="auto">
+          <a:xfrm>
+            <a:off x="2912545" y="3272590"/>
+            <a:ext cx="6366909" cy="2902879"/>
+          </a:xfrm>
+          <a:prstGeom prst="rect">
+            <a:avLst/>
+          </a:prstGeom>
+          <a:noFill/>
+          <a:extLst>
+            <a:ext uri="{909E8E84-426E-40DD-AFC4-6F175D3DCCD1}">
+              <a14:hiddenFill xmlns:a14="http://schemas.microsoft.com/office/drawing/2010/main">
+                <a:solidFill>
+                  <a:srgbClr val="FFFFFF"/>
+                </a:solidFill>
+              </a14:hiddenFill>
+            </a:ext>
+          </a:extLst>
+        </p:spPr>
+      </p:pic>
+    </p:spTree>
+    <p:extLst>
+      <p:ext uri="{BB962C8B-B14F-4D97-AF65-F5344CB8AC3E}">
+        <p14:creationId xmlns:p14="http://schemas.microsoft.com/office/powerpoint/2010/main" val="2246873371"/>
+      </p:ext>
+    </p:extLst>
+  </p:cSld>
+  <p:clrMapOvr>
+    <a:masterClrMapping/>
+  </p:clrMapOvr>
+</p:sld>
+</file>
+
+<file path=ppt/slides/slide12.xml><?xml version="1.0" encoding="utf-8"?>
+<p:sld xmlns:a="http://schemas.openxmlformats.org/drawingml/2006/main" xmlns:r="http://schemas.openxmlformats.org/officeDocument/2006/relationships" xmlns:p="http://schemas.openxmlformats.org/presentationml/2006/main">
+  <p:cSld>
+    <p:spTree>
+      <p:nvGrpSpPr>
+        <p:cNvPr id="1" name="">
+          <a:extLst>
+            <a:ext uri="{FF2B5EF4-FFF2-40B4-BE49-F238E27FC236}">
+              <a16:creationId xmlns:a16="http://schemas.microsoft.com/office/drawing/2014/main" id="{E8FCD14E-8D81-5F1F-9631-073E80CDE30E}"/>
+            </a:ext>
+          </a:extLst>
+        </p:cNvPr>
+        <p:cNvGrpSpPr/>
+        <p:nvPr/>
+      </p:nvGrpSpPr>
+      <p:grpSpPr>
+        <a:xfrm>
+          <a:off x="0" y="0"/>
+          <a:ext cx="0" cy="0"/>
+          <a:chOff x="0" y="0"/>
+          <a:chExt cx="0" cy="0"/>
+        </a:xfrm>
+      </p:grpSpPr>
+      <p:sp>
+        <p:nvSpPr>
+          <p:cNvPr id="2" name="Título 1">
+            <a:extLst>
+              <a:ext uri="{FF2B5EF4-FFF2-40B4-BE49-F238E27FC236}">
+                <a16:creationId xmlns:a16="http://schemas.microsoft.com/office/drawing/2014/main" id="{4D08358F-8408-E217-5B7F-9E6A329B2FA7}"/>
+              </a:ext>
+            </a:extLst>
+          </p:cNvPr>
+          <p:cNvSpPr>
+            <a:spLocks noGrp="1"/>
+          </p:cNvSpPr>
+          <p:nvPr>
+            <p:ph type="title"/>
+          </p:nvPr>
+        </p:nvSpPr>
+        <p:spPr/>
+        <p:txBody>
+          <a:bodyPr/>
+          <a:lstStyle/>
+          <a:p>
+            <a:r>
+              <a:rPr lang="pt-BR" dirty="0"/>
+              <a:t>Cabeçalho de requisição do Protocolo HTTP</a:t>
+            </a:r>
+          </a:p>
+        </p:txBody>
+      </p:sp>
+      <p:sp>
+        <p:nvSpPr>
+          <p:cNvPr id="3" name="Espaço Reservado para Conteúdo 2">
+            <a:extLst>
+              <a:ext uri="{FF2B5EF4-FFF2-40B4-BE49-F238E27FC236}">
+                <a16:creationId xmlns:a16="http://schemas.microsoft.com/office/drawing/2014/main" id="{FC02D192-BA1A-B833-D32E-7F54A67A7949}"/>
+              </a:ext>
+            </a:extLst>
+          </p:cNvPr>
+          <p:cNvSpPr>
+            <a:spLocks noGrp="1"/>
+          </p:cNvSpPr>
+          <p:nvPr>
+            <p:ph idx="1"/>
+          </p:nvPr>
+        </p:nvSpPr>
+        <p:spPr>
+          <a:xfrm>
+            <a:off x="592347" y="1844674"/>
+            <a:ext cx="11007306" cy="4491958"/>
+          </a:xfrm>
+        </p:spPr>
+        <p:txBody>
+          <a:bodyPr/>
+          <a:lstStyle/>
+          <a:p>
+            <a:r>
+              <a:rPr lang="pt-BR" dirty="0"/>
+              <a:t>Para que serve cada campo:</a:t>
+            </a:r>
+          </a:p>
+          <a:p>
+            <a:pPr marL="1028700" lvl="1" indent="-342900" algn="just">
+              <a:spcAft>
+                <a:spcPts val="500"/>
+              </a:spcAft>
+            </a:pPr>
+            <a:r>
+              <a:rPr lang="pt-BR" b="1" dirty="0"/>
+              <a:t>Método </a:t>
+            </a:r>
+            <a:r>
+              <a:rPr lang="pt-BR" dirty="0"/>
+              <a:t>→ Define qual método será utilizado, como por exemplo o método POST.</a:t>
+            </a:r>
+          </a:p>
+          <a:p>
+            <a:pPr marL="1028700" lvl="1" indent="-342900" algn="just">
+              <a:spcAft>
+                <a:spcPts val="500"/>
+              </a:spcAft>
+            </a:pPr>
+            <a:r>
+              <a:rPr lang="pt-BR" b="1" dirty="0"/>
+              <a:t>URI </a:t>
+            </a:r>
+            <a:r>
+              <a:rPr lang="pt-BR" dirty="0"/>
+              <a:t>→ Define onde a requisição será aplicada no servidor.</a:t>
+            </a:r>
+          </a:p>
+          <a:p>
+            <a:pPr marL="1028700" lvl="1" indent="-342900" algn="just">
+              <a:spcAft>
+                <a:spcPts val="500"/>
+              </a:spcAft>
+            </a:pPr>
+            <a:r>
+              <a:rPr lang="pt-BR" b="1" dirty="0"/>
+              <a:t>Versão </a:t>
+            </a:r>
+            <a:r>
+              <a:rPr lang="pt-BR" dirty="0"/>
+              <a:t>→ Indica a versão do protocolo HTTP, como no exemplo a versão 1.1.</a:t>
+            </a:r>
+          </a:p>
+          <a:p>
+            <a:pPr marL="1028700" lvl="1" indent="-342900" algn="just">
+              <a:spcAft>
+                <a:spcPts val="500"/>
+              </a:spcAft>
+            </a:pPr>
+            <a:r>
+              <a:rPr lang="pt-BR" b="1" dirty="0"/>
+              <a:t>Host</a:t>
+            </a:r>
+            <a:r>
+              <a:rPr lang="pt-BR" dirty="0"/>
+              <a:t> → Informa o endereço do servidor que vai receber a requisição e a porta que será utilizada.</a:t>
+            </a:r>
+          </a:p>
+          <a:p>
+            <a:pPr marL="1028700" lvl="1" indent="-342900" algn="just">
+              <a:spcAft>
+                <a:spcPts val="500"/>
+              </a:spcAft>
+            </a:pPr>
+            <a:r>
+              <a:rPr lang="pt-BR" b="1" dirty="0"/>
+              <a:t>Connection</a:t>
+            </a:r>
+            <a:r>
+              <a:rPr lang="pt-BR" dirty="0"/>
+              <a:t> → Define se a conexão deve permanecer aberta, no </a:t>
+            </a:r>
+            <a:r>
+              <a:rPr lang="pt-BR" dirty="0" err="1"/>
+              <a:t>keep-alive</a:t>
+            </a:r>
+            <a:r>
+              <a:rPr lang="pt-BR" dirty="0"/>
+              <a:t> define que a conexão deve ser mantida aberta.</a:t>
+            </a:r>
+          </a:p>
+          <a:p>
+            <a:pPr marL="1028700" lvl="1" indent="-342900" algn="just">
+              <a:spcAft>
+                <a:spcPts val="500"/>
+              </a:spcAft>
+            </a:pPr>
+            <a:r>
+              <a:rPr lang="pt-BR" b="1" dirty="0" err="1"/>
+              <a:t>Content-Type</a:t>
+            </a:r>
+            <a:r>
+              <a:rPr lang="pt-BR" dirty="0"/>
+              <a:t> → Indica o tipo de dado enviado no corpo da requisição, como por exemplo o JSON.</a:t>
+            </a:r>
+          </a:p>
+          <a:p>
+            <a:pPr marL="1028700" lvl="1" indent="-342900" algn="just">
+              <a:spcAft>
+                <a:spcPts val="500"/>
+              </a:spcAft>
+            </a:pPr>
+            <a:r>
+              <a:rPr lang="pt-BR" b="1" dirty="0"/>
+              <a:t>Corpo (body) </a:t>
+            </a:r>
+            <a:r>
+              <a:rPr lang="pt-BR" dirty="0"/>
+              <a:t>→ Contém os </a:t>
+            </a:r>
+            <a:r>
+              <a:rPr lang="pt-BR" b="1" dirty="0"/>
+              <a:t>dados enviados para o servidor</a:t>
+            </a:r>
+            <a:r>
+              <a:rPr lang="pt-BR" dirty="0"/>
+              <a:t>.</a:t>
+            </a:r>
+          </a:p>
+          <a:p>
+            <a:pPr marL="1028700" lvl="1" indent="-342900" algn="just">
+              <a:spcAft>
+                <a:spcPts val="500"/>
+              </a:spcAft>
+            </a:pPr>
+            <a:endParaRPr lang="pt-BR" dirty="0"/>
+          </a:p>
+          <a:p>
+            <a:endParaRPr lang="pt-BR" dirty="0"/>
+          </a:p>
+          <a:p>
+            <a:endParaRPr lang="pt-BR" dirty="0"/>
+          </a:p>
+          <a:p>
+            <a:endParaRPr lang="pt-BR" dirty="0"/>
+          </a:p>
+        </p:txBody>
+      </p:sp>
+    </p:spTree>
+    <p:extLst>
+      <p:ext uri="{BB962C8B-B14F-4D97-AF65-F5344CB8AC3E}">
+        <p14:creationId xmlns:p14="http://schemas.microsoft.com/office/powerpoint/2010/main" val="3870230043"/>
+      </p:ext>
+    </p:extLst>
+  </p:cSld>
+  <p:clrMapOvr>
+    <a:masterClrMapping/>
+  </p:clrMapOvr>
+</p:sld>
+</file>
+
+<file path=ppt/slides/slide13.xml><?xml version="1.0" encoding="utf-8"?>
+<p:sld xmlns:a="http://schemas.openxmlformats.org/drawingml/2006/main" xmlns:r="http://schemas.openxmlformats.org/officeDocument/2006/relationships" xmlns:p="http://schemas.openxmlformats.org/presentationml/2006/main">
+  <p:cSld>
+    <p:spTree>
+      <p:nvGrpSpPr>
+        <p:cNvPr id="1" name="">
+          <a:extLst>
+            <a:ext uri="{FF2B5EF4-FFF2-40B4-BE49-F238E27FC236}">
+              <a16:creationId xmlns:a16="http://schemas.microsoft.com/office/drawing/2014/main" id="{D23F746F-0D95-B089-0638-0FE68A8958EB}"/>
+            </a:ext>
+          </a:extLst>
+        </p:cNvPr>
+        <p:cNvGrpSpPr/>
+        <p:nvPr/>
+      </p:nvGrpSpPr>
+      <p:grpSpPr>
+        <a:xfrm>
+          <a:off x="0" y="0"/>
+          <a:ext cx="0" cy="0"/>
+          <a:chOff x="0" y="0"/>
+          <a:chExt cx="0" cy="0"/>
+        </a:xfrm>
+      </p:grpSpPr>
+      <p:sp>
+        <p:nvSpPr>
+          <p:cNvPr id="2" name="Título 1">
+            <a:extLst>
+              <a:ext uri="{FF2B5EF4-FFF2-40B4-BE49-F238E27FC236}">
+                <a16:creationId xmlns:a16="http://schemas.microsoft.com/office/drawing/2014/main" id="{BD219227-3606-076A-5A91-E3E0EBE74E71}"/>
+              </a:ext>
+            </a:extLst>
+          </p:cNvPr>
+          <p:cNvSpPr>
+            <a:spLocks noGrp="1"/>
+          </p:cNvSpPr>
+          <p:nvPr>
+            <p:ph type="title"/>
+          </p:nvPr>
+        </p:nvSpPr>
+        <p:spPr/>
+        <p:txBody>
+          <a:bodyPr/>
+          <a:lstStyle/>
+          <a:p>
+            <a:r>
+              <a:rPr lang="pt-BR" dirty="0"/>
+              <a:t>Cabeçalho de resposta do Protocolo HTTP</a:t>
+            </a:r>
+          </a:p>
+        </p:txBody>
+      </p:sp>
+      <p:sp>
+        <p:nvSpPr>
+          <p:cNvPr id="3" name="Espaço Reservado para Conteúdo 2">
+            <a:extLst>
+              <a:ext uri="{FF2B5EF4-FFF2-40B4-BE49-F238E27FC236}">
+                <a16:creationId xmlns:a16="http://schemas.microsoft.com/office/drawing/2014/main" id="{2FA8AEA2-DB12-4BE1-B618-3CE41B8421D1}"/>
+              </a:ext>
+            </a:extLst>
+          </p:cNvPr>
+          <p:cNvSpPr>
+            <a:spLocks noGrp="1"/>
+          </p:cNvSpPr>
+          <p:nvPr>
+            <p:ph idx="1"/>
+          </p:nvPr>
+        </p:nvSpPr>
+        <p:spPr/>
+        <p:txBody>
+          <a:bodyPr/>
+          <a:lstStyle/>
+          <a:p>
+            <a:endParaRPr lang="pt-BR" dirty="0"/>
+          </a:p>
+        </p:txBody>
+      </p:sp>
+    </p:spTree>
+    <p:extLst>
+      <p:ext uri="{BB962C8B-B14F-4D97-AF65-F5344CB8AC3E}">
+        <p14:creationId xmlns:p14="http://schemas.microsoft.com/office/powerpoint/2010/main" val="598368988"/>
+      </p:ext>
+    </p:extLst>
+  </p:cSld>
+  <p:clrMapOvr>
+    <a:masterClrMapping/>
+  </p:clrMapOvr>
+</p:sld>
+</file>
+
 <file path=ppt/slides/slide2.xml><?xml version="1.0" encoding="utf-8"?>
 <p:sld xmlns:a="http://schemas.openxmlformats.org/drawingml/2006/main" xmlns:r="http://schemas.openxmlformats.org/officeDocument/2006/relationships" xmlns:p="http://schemas.openxmlformats.org/presentationml/2006/main">
   <p:cSld>
@@ -4215,7 +4940,10 @@
           <a:bodyPr/>
           <a:lstStyle/>
           <a:p>
-            <a:endParaRPr lang="pt-BR"/>
+            <a:r>
+              <a:rPr lang="pt-BR" dirty="0"/>
+              <a:t>Problemas das antigas tecnologias	</a:t>
+            </a:r>
           </a:p>
         </p:txBody>
       </p:sp>
@@ -4235,19 +4963,2194 @@
             <p:ph idx="1"/>
           </p:nvPr>
         </p:nvSpPr>
-        <p:spPr/>
+        <p:spPr>
+          <a:xfrm>
+            <a:off x="592347" y="1844675"/>
+            <a:ext cx="11007306" cy="1441989"/>
+          </a:xfrm>
+        </p:spPr>
         <p:txBody>
           <a:bodyPr/>
           <a:lstStyle/>
           <a:p>
-            <a:endParaRPr lang="pt-BR"/>
-          </a:p>
-        </p:txBody>
-      </p:sp>
+            <a:pPr algn="just"/>
+            <a:r>
+              <a:rPr lang="pt-BR" sz="1800" dirty="0"/>
+              <a:t>Antes do surgimento do </a:t>
+            </a:r>
+            <a:r>
+              <a:rPr lang="pt-BR" sz="1800" b="1" dirty="0"/>
+              <a:t>Spring Boot</a:t>
+            </a:r>
+            <a:r>
+              <a:rPr lang="pt-BR" sz="1800" dirty="0"/>
+              <a:t>, o desenvolvimento web em Java era complexo e pouco produtivo. Com tecnologias como o Java EE, era necessário lidar com muitas configurações manuais, arquivos XML extensos e integração difícil entre componentes. Além disso, o alto acoplamento tornava a manutenção mais complicada e lenta. </a:t>
+            </a:r>
+            <a:endParaRPr lang="pt-BR" dirty="0"/>
+          </a:p>
+        </p:txBody>
+      </p:sp>
+      <p:pic>
+        <p:nvPicPr>
+          <p:cNvPr id="5" name="Imagem 4">
+            <a:extLst>
+              <a:ext uri="{FF2B5EF4-FFF2-40B4-BE49-F238E27FC236}">
+                <a16:creationId xmlns:a16="http://schemas.microsoft.com/office/drawing/2014/main" id="{A1C458B5-65B7-10A3-F162-6440DFE3430D}"/>
+              </a:ext>
+            </a:extLst>
+          </p:cNvPr>
+          <p:cNvPicPr>
+            <a:picLocks noChangeAspect="1"/>
+          </p:cNvPicPr>
+          <p:nvPr/>
+        </p:nvPicPr>
+        <p:blipFill>
+          <a:blip r:embed="rId2"/>
+          <a:stretch>
+            <a:fillRect/>
+          </a:stretch>
+        </p:blipFill>
+        <p:spPr>
+          <a:xfrm>
+            <a:off x="7592973" y="3773316"/>
+            <a:ext cx="2276793" cy="2353003"/>
+          </a:xfrm>
+          <a:prstGeom prst="rect">
+            <a:avLst/>
+          </a:prstGeom>
+        </p:spPr>
+      </p:pic>
+      <p:pic>
+        <p:nvPicPr>
+          <p:cNvPr id="1026" name="Picture 2" descr="Importando e editando um arquivo XML">
+            <a:extLst>
+              <a:ext uri="{FF2B5EF4-FFF2-40B4-BE49-F238E27FC236}">
+                <a16:creationId xmlns:a16="http://schemas.microsoft.com/office/drawing/2014/main" id="{7F51AE2C-38C2-D7A9-8EB3-2871C0C068B5}"/>
+              </a:ext>
+            </a:extLst>
+          </p:cNvPr>
+          <p:cNvPicPr>
+            <a:picLocks noChangeAspect="1" noChangeArrowheads="1"/>
+          </p:cNvPicPr>
+          <p:nvPr/>
+        </p:nvPicPr>
+        <p:blipFill>
+          <a:blip r:embed="rId3">
+            <a:extLst>
+              <a:ext uri="{28A0092B-C50C-407E-A947-70E740481C1C}">
+                <a14:useLocalDpi xmlns:a14="http://schemas.microsoft.com/office/drawing/2010/main" val="0"/>
+              </a:ext>
+            </a:extLst>
+          </a:blip>
+          <a:srcRect/>
+          <a:stretch>
+            <a:fillRect/>
+          </a:stretch>
+        </p:blipFill>
+        <p:spPr bwMode="auto">
+          <a:xfrm>
+            <a:off x="2107254" y="3286664"/>
+            <a:ext cx="3755833" cy="3326309"/>
+          </a:xfrm>
+          <a:prstGeom prst="rect">
+            <a:avLst/>
+          </a:prstGeom>
+          <a:noFill/>
+          <a:extLst>
+            <a:ext uri="{909E8E84-426E-40DD-AFC4-6F175D3DCCD1}">
+              <a14:hiddenFill xmlns:a14="http://schemas.microsoft.com/office/drawing/2010/main">
+                <a:solidFill>
+                  <a:srgbClr val="FFFFFF"/>
+                </a:solidFill>
+              </a14:hiddenFill>
+            </a:ext>
+          </a:extLst>
+        </p:spPr>
+      </p:pic>
     </p:spTree>
     <p:extLst>
       <p:ext uri="{BB962C8B-B14F-4D97-AF65-F5344CB8AC3E}">
         <p14:creationId xmlns:p14="http://schemas.microsoft.com/office/powerpoint/2010/main" val="1036237144"/>
+      </p:ext>
+    </p:extLst>
+  </p:cSld>
+  <p:clrMapOvr>
+    <a:masterClrMapping/>
+  </p:clrMapOvr>
+</p:sld>
+</file>
+
+<file path=ppt/slides/slide4.xml><?xml version="1.0" encoding="utf-8"?>
+<p:sld xmlns:a="http://schemas.openxmlformats.org/drawingml/2006/main" xmlns:r="http://schemas.openxmlformats.org/officeDocument/2006/relationships" xmlns:p="http://schemas.openxmlformats.org/presentationml/2006/main">
+  <p:cSld>
+    <p:spTree>
+      <p:nvGrpSpPr>
+        <p:cNvPr id="1" name=""/>
+        <p:cNvGrpSpPr/>
+        <p:nvPr/>
+      </p:nvGrpSpPr>
+      <p:grpSpPr>
+        <a:xfrm>
+          <a:off x="0" y="0"/>
+          <a:ext cx="0" cy="0"/>
+          <a:chOff x="0" y="0"/>
+          <a:chExt cx="0" cy="0"/>
+        </a:xfrm>
+      </p:grpSpPr>
+      <p:sp>
+        <p:nvSpPr>
+          <p:cNvPr id="2" name="Título 1">
+            <a:extLst>
+              <a:ext uri="{FF2B5EF4-FFF2-40B4-BE49-F238E27FC236}">
+                <a16:creationId xmlns:a16="http://schemas.microsoft.com/office/drawing/2014/main" id="{10D813B1-5C97-9207-858A-351037615227}"/>
+              </a:ext>
+            </a:extLst>
+          </p:cNvPr>
+          <p:cNvSpPr>
+            <a:spLocks noGrp="1"/>
+          </p:cNvSpPr>
+          <p:nvPr>
+            <p:ph type="title"/>
+          </p:nvPr>
+        </p:nvSpPr>
+        <p:spPr/>
+        <p:txBody>
+          <a:bodyPr/>
+          <a:lstStyle/>
+          <a:p>
+            <a:r>
+              <a:rPr lang="pt-BR" dirty="0"/>
+              <a:t>Spring Boot</a:t>
+            </a:r>
+          </a:p>
+        </p:txBody>
+      </p:sp>
+      <p:sp>
+        <p:nvSpPr>
+          <p:cNvPr id="3" name="Espaço Reservado para Conteúdo 2">
+            <a:extLst>
+              <a:ext uri="{FF2B5EF4-FFF2-40B4-BE49-F238E27FC236}">
+                <a16:creationId xmlns:a16="http://schemas.microsoft.com/office/drawing/2014/main" id="{3AA2CA54-8C44-C4D7-F939-D281AD3F14AE}"/>
+              </a:ext>
+            </a:extLst>
+          </p:cNvPr>
+          <p:cNvSpPr>
+            <a:spLocks noGrp="1"/>
+          </p:cNvSpPr>
+          <p:nvPr>
+            <p:ph idx="1"/>
+          </p:nvPr>
+        </p:nvSpPr>
+        <p:spPr/>
+        <p:txBody>
+          <a:bodyPr/>
+          <a:lstStyle/>
+          <a:p>
+            <a:r>
+              <a:rPr lang="pt-BR" dirty="0"/>
+              <a:t>O </a:t>
+            </a:r>
+            <a:r>
+              <a:rPr lang="pt-BR" b="1" dirty="0"/>
+              <a:t>Spring Boot</a:t>
+            </a:r>
+            <a:r>
+              <a:rPr lang="pt-BR" dirty="0"/>
+              <a:t> resolve os problemas do desenvolvimento web em Java tornando o processo mais simples e produtivo.</a:t>
+            </a:r>
+          </a:p>
+          <a:p>
+            <a:r>
+              <a:rPr lang="pt-BR" b="1" dirty="0"/>
+              <a:t>Principais Melhorias:</a:t>
+            </a:r>
+          </a:p>
+          <a:p>
+            <a:pPr marL="1028700" lvl="1" indent="-342900"/>
+            <a:r>
+              <a:rPr lang="pt-BR" b="1" dirty="0"/>
+              <a:t>Configuração automática</a:t>
+            </a:r>
+            <a:r>
+              <a:rPr lang="pt-BR" dirty="0"/>
+              <a:t> → elimina XML e configurações manuais </a:t>
+            </a:r>
+          </a:p>
+          <a:p>
+            <a:pPr marL="1028700" lvl="1" indent="-342900"/>
+            <a:r>
+              <a:rPr lang="pt-BR" b="1" dirty="0"/>
+              <a:t>Servidor embutido</a:t>
+            </a:r>
+            <a:r>
+              <a:rPr lang="pt-BR" dirty="0"/>
+              <a:t> → roda a aplicação direto (</a:t>
+            </a:r>
+            <a:r>
+              <a:rPr lang="pt-BR" dirty="0" err="1"/>
+              <a:t>ex</a:t>
+            </a:r>
+            <a:r>
+              <a:rPr lang="pt-BR" dirty="0"/>
+              <a:t>: Apache </a:t>
+            </a:r>
+            <a:r>
+              <a:rPr lang="pt-BR" dirty="0" err="1"/>
+              <a:t>Tomcat</a:t>
+            </a:r>
+            <a:r>
+              <a:rPr lang="pt-BR" dirty="0"/>
+              <a:t>) </a:t>
+            </a:r>
+          </a:p>
+          <a:p>
+            <a:pPr marL="1028700" lvl="1" indent="-342900"/>
+            <a:r>
+              <a:rPr lang="pt-BR" b="1" dirty="0"/>
+              <a:t>Menor acoplamento</a:t>
+            </a:r>
+            <a:r>
+              <a:rPr lang="pt-BR" dirty="0"/>
+              <a:t> → facilita manutenção e evolução (herdado do Spring Framework) </a:t>
+            </a:r>
+          </a:p>
+          <a:p>
+            <a:pPr marL="1028700" lvl="1" indent="-342900"/>
+            <a:r>
+              <a:rPr lang="pt-BR" b="1" dirty="0"/>
+              <a:t>Mais produtividade</a:t>
+            </a:r>
+            <a:r>
+              <a:rPr lang="pt-BR" dirty="0"/>
+              <a:t> → foco na regra de negócio </a:t>
+            </a:r>
+          </a:p>
+          <a:p>
+            <a:pPr marL="1028700" lvl="1" indent="-342900"/>
+            <a:r>
+              <a:rPr lang="pt-BR" b="1" dirty="0"/>
+              <a:t>Inicialização rápida</a:t>
+            </a:r>
+            <a:r>
+              <a:rPr lang="pt-BR" dirty="0"/>
+              <a:t> → projeto pronto em poucos minutos</a:t>
+            </a:r>
+          </a:p>
+          <a:p>
+            <a:endParaRPr lang="pt-BR" dirty="0"/>
+          </a:p>
+        </p:txBody>
+      </p:sp>
+    </p:spTree>
+    <p:extLst>
+      <p:ext uri="{BB962C8B-B14F-4D97-AF65-F5344CB8AC3E}">
+        <p14:creationId xmlns:p14="http://schemas.microsoft.com/office/powerpoint/2010/main" val="3087429862"/>
+      </p:ext>
+    </p:extLst>
+  </p:cSld>
+  <p:clrMapOvr>
+    <a:masterClrMapping/>
+  </p:clrMapOvr>
+</p:sld>
+</file>
+
+<file path=ppt/slides/slide5.xml><?xml version="1.0" encoding="utf-8"?>
+<p:sld xmlns:a="http://schemas.openxmlformats.org/drawingml/2006/main" xmlns:r="http://schemas.openxmlformats.org/officeDocument/2006/relationships" xmlns:p="http://schemas.openxmlformats.org/presentationml/2006/main">
+  <p:cSld>
+    <p:spTree>
+      <p:nvGrpSpPr>
+        <p:cNvPr id="1" name=""/>
+        <p:cNvGrpSpPr/>
+        <p:nvPr/>
+      </p:nvGrpSpPr>
+      <p:grpSpPr>
+        <a:xfrm>
+          <a:off x="0" y="0"/>
+          <a:ext cx="0" cy="0"/>
+          <a:chOff x="0" y="0"/>
+          <a:chExt cx="0" cy="0"/>
+        </a:xfrm>
+      </p:grpSpPr>
+      <p:sp>
+        <p:nvSpPr>
+          <p:cNvPr id="2" name="Título 1">
+            <a:extLst>
+              <a:ext uri="{FF2B5EF4-FFF2-40B4-BE49-F238E27FC236}">
+                <a16:creationId xmlns:a16="http://schemas.microsoft.com/office/drawing/2014/main" id="{377B3345-AFD9-E34B-B421-74245CCA0836}"/>
+              </a:ext>
+            </a:extLst>
+          </p:cNvPr>
+          <p:cNvSpPr>
+            <a:spLocks noGrp="1"/>
+          </p:cNvSpPr>
+          <p:nvPr>
+            <p:ph type="title"/>
+          </p:nvPr>
+        </p:nvSpPr>
+        <p:spPr>
+          <a:xfrm>
+            <a:off x="749185" y="854420"/>
+            <a:ext cx="6203706" cy="448573"/>
+          </a:xfrm>
+        </p:spPr>
+        <p:txBody>
+          <a:bodyPr/>
+          <a:lstStyle/>
+          <a:p>
+            <a:r>
+              <a:rPr lang="pt-BR" dirty="0"/>
+              <a:t>Empresas que usam Spring </a:t>
+            </a:r>
+          </a:p>
+        </p:txBody>
+      </p:sp>
+      <p:sp>
+        <p:nvSpPr>
+          <p:cNvPr id="3" name="Espaço Reservado para Conteúdo 2">
+            <a:extLst>
+              <a:ext uri="{FF2B5EF4-FFF2-40B4-BE49-F238E27FC236}">
+                <a16:creationId xmlns:a16="http://schemas.microsoft.com/office/drawing/2014/main" id="{FC533291-79BC-54E5-EFB5-34A2909B18E3}"/>
+              </a:ext>
+            </a:extLst>
+          </p:cNvPr>
+          <p:cNvSpPr>
+            <a:spLocks noGrp="1"/>
+          </p:cNvSpPr>
+          <p:nvPr>
+            <p:ph idx="1"/>
+          </p:nvPr>
+        </p:nvSpPr>
+        <p:spPr>
+          <a:xfrm>
+            <a:off x="592346" y="1844675"/>
+            <a:ext cx="8499895" cy="544842"/>
+          </a:xfrm>
+        </p:spPr>
+        <p:txBody>
+          <a:bodyPr/>
+          <a:lstStyle/>
+          <a:p>
+            <a:r>
+              <a:rPr lang="pt-BR" dirty="0"/>
+              <a:t>Grandes empresas utilizam o ecossistema Spring:</a:t>
+            </a:r>
+          </a:p>
+        </p:txBody>
+      </p:sp>
+      <p:pic>
+        <p:nvPicPr>
+          <p:cNvPr id="5" name="Imagem 4">
+            <a:extLst>
+              <a:ext uri="{FF2B5EF4-FFF2-40B4-BE49-F238E27FC236}">
+                <a16:creationId xmlns:a16="http://schemas.microsoft.com/office/drawing/2014/main" id="{F6E6B109-E2E4-3723-1D58-43BB4CA5AE81}"/>
+              </a:ext>
+            </a:extLst>
+          </p:cNvPr>
+          <p:cNvPicPr>
+            <a:picLocks noChangeAspect="1"/>
+          </p:cNvPicPr>
+          <p:nvPr/>
+        </p:nvPicPr>
+        <p:blipFill>
+          <a:blip r:embed="rId2"/>
+          <a:stretch>
+            <a:fillRect/>
+          </a:stretch>
+        </p:blipFill>
+        <p:spPr>
+          <a:xfrm>
+            <a:off x="888000" y="2737186"/>
+            <a:ext cx="2880000" cy="1383629"/>
+          </a:xfrm>
+          <a:prstGeom prst="rect">
+            <a:avLst/>
+          </a:prstGeom>
+        </p:spPr>
+      </p:pic>
+      <p:pic>
+        <p:nvPicPr>
+          <p:cNvPr id="2050" name="Picture 2" descr="Comércio eletrônico abre as portas da exportação para produtores brasileiros">
+            <a:extLst>
+              <a:ext uri="{FF2B5EF4-FFF2-40B4-BE49-F238E27FC236}">
+                <a16:creationId xmlns:a16="http://schemas.microsoft.com/office/drawing/2014/main" id="{508A051F-C857-87EC-F91E-523E0F34B730}"/>
+              </a:ext>
+            </a:extLst>
+          </p:cNvPr>
+          <p:cNvPicPr>
+            <a:picLocks noChangeAspect="1" noChangeArrowheads="1"/>
+          </p:cNvPicPr>
+          <p:nvPr/>
+        </p:nvPicPr>
+        <p:blipFill>
+          <a:blip r:embed="rId3">
+            <a:extLst>
+              <a:ext uri="{28A0092B-C50C-407E-A947-70E740481C1C}">
+                <a14:useLocalDpi xmlns:a14="http://schemas.microsoft.com/office/drawing/2010/main" val="0"/>
+              </a:ext>
+            </a:extLst>
+          </a:blip>
+          <a:srcRect/>
+          <a:stretch>
+            <a:fillRect/>
+          </a:stretch>
+        </p:blipFill>
+        <p:spPr bwMode="auto">
+          <a:xfrm>
+            <a:off x="952947" y="4824734"/>
+            <a:ext cx="2880000" cy="1087500"/>
+          </a:xfrm>
+          <a:prstGeom prst="rect">
+            <a:avLst/>
+          </a:prstGeom>
+          <a:noFill/>
+          <a:extLst>
+            <a:ext uri="{909E8E84-426E-40DD-AFC4-6F175D3DCCD1}">
+              <a14:hiddenFill xmlns:a14="http://schemas.microsoft.com/office/drawing/2010/main">
+                <a:solidFill>
+                  <a:srgbClr val="FFFFFF"/>
+                </a:solidFill>
+              </a14:hiddenFill>
+            </a:ext>
+          </a:extLst>
+        </p:spPr>
+      </p:pic>
+      <p:pic>
+        <p:nvPicPr>
+          <p:cNvPr id="2052" name="Picture 4" descr="O Poder do LinkedIn para Expandir Sua Rede Social, Profissional e Acadêmica">
+            <a:extLst>
+              <a:ext uri="{FF2B5EF4-FFF2-40B4-BE49-F238E27FC236}">
+                <a16:creationId xmlns:a16="http://schemas.microsoft.com/office/drawing/2014/main" id="{119EBFAD-0BC8-86BC-6FCA-6197E5ECA7D3}"/>
+              </a:ext>
+            </a:extLst>
+          </p:cNvPr>
+          <p:cNvPicPr>
+            <a:picLocks noChangeAspect="1" noChangeArrowheads="1"/>
+          </p:cNvPicPr>
+          <p:nvPr/>
+        </p:nvPicPr>
+        <p:blipFill>
+          <a:blip r:embed="rId4">
+            <a:extLst>
+              <a:ext uri="{28A0092B-C50C-407E-A947-70E740481C1C}">
+                <a14:useLocalDpi xmlns:a14="http://schemas.microsoft.com/office/drawing/2010/main" val="0"/>
+              </a:ext>
+            </a:extLst>
+          </a:blip>
+          <a:srcRect/>
+          <a:stretch>
+            <a:fillRect/>
+          </a:stretch>
+        </p:blipFill>
+        <p:spPr bwMode="auto">
+          <a:xfrm>
+            <a:off x="4785894" y="4468484"/>
+            <a:ext cx="2880000" cy="1800000"/>
+          </a:xfrm>
+          <a:prstGeom prst="rect">
+            <a:avLst/>
+          </a:prstGeom>
+          <a:noFill/>
+          <a:extLst>
+            <a:ext uri="{909E8E84-426E-40DD-AFC4-6F175D3DCCD1}">
+              <a14:hiddenFill xmlns:a14="http://schemas.microsoft.com/office/drawing/2010/main">
+                <a:solidFill>
+                  <a:srgbClr val="FFFFFF"/>
+                </a:solidFill>
+              </a14:hiddenFill>
+            </a:ext>
+          </a:extLst>
+        </p:spPr>
+      </p:pic>
+      <p:pic>
+        <p:nvPicPr>
+          <p:cNvPr id="2054" name="Picture 6" descr="Início da operação Mitsui Sumitomo Seguros e Porto - Mitsui Sumitomo Seguros">
+            <a:extLst>
+              <a:ext uri="{FF2B5EF4-FFF2-40B4-BE49-F238E27FC236}">
+                <a16:creationId xmlns:a16="http://schemas.microsoft.com/office/drawing/2014/main" id="{7CEFD892-5907-E446-4E19-A4DE63D176A9}"/>
+              </a:ext>
+            </a:extLst>
+          </p:cNvPr>
+          <p:cNvPicPr>
+            <a:picLocks noChangeAspect="1" noChangeArrowheads="1"/>
+          </p:cNvPicPr>
+          <p:nvPr/>
+        </p:nvPicPr>
+        <p:blipFill>
+          <a:blip r:embed="rId5">
+            <a:extLst>
+              <a:ext uri="{28A0092B-C50C-407E-A947-70E740481C1C}">
+                <a14:useLocalDpi xmlns:a14="http://schemas.microsoft.com/office/drawing/2010/main" val="0"/>
+              </a:ext>
+            </a:extLst>
+          </a:blip>
+          <a:srcRect/>
+          <a:stretch>
+            <a:fillRect/>
+          </a:stretch>
+        </p:blipFill>
+        <p:spPr bwMode="auto">
+          <a:xfrm>
+            <a:off x="8424000" y="2935688"/>
+            <a:ext cx="2880000" cy="986625"/>
+          </a:xfrm>
+          <a:prstGeom prst="rect">
+            <a:avLst/>
+          </a:prstGeom>
+          <a:noFill/>
+          <a:extLst>
+            <a:ext uri="{909E8E84-426E-40DD-AFC4-6F175D3DCCD1}">
+              <a14:hiddenFill xmlns:a14="http://schemas.microsoft.com/office/drawing/2010/main">
+                <a:solidFill>
+                  <a:srgbClr val="FFFFFF"/>
+                </a:solidFill>
+              </a14:hiddenFill>
+            </a:ext>
+          </a:extLst>
+        </p:spPr>
+      </p:pic>
+      <p:pic>
+        <p:nvPicPr>
+          <p:cNvPr id="8" name="Imagem 7">
+            <a:extLst>
+              <a:ext uri="{FF2B5EF4-FFF2-40B4-BE49-F238E27FC236}">
+                <a16:creationId xmlns:a16="http://schemas.microsoft.com/office/drawing/2014/main" id="{B9FF9A8C-C81B-AB02-CB92-865292A07D0F}"/>
+              </a:ext>
+            </a:extLst>
+          </p:cNvPr>
+          <p:cNvPicPr>
+            <a:picLocks noChangeAspect="1"/>
+          </p:cNvPicPr>
+          <p:nvPr/>
+        </p:nvPicPr>
+        <p:blipFill>
+          <a:blip r:embed="rId6"/>
+          <a:stretch>
+            <a:fillRect/>
+          </a:stretch>
+        </p:blipFill>
+        <p:spPr>
+          <a:xfrm>
+            <a:off x="4656000" y="2662548"/>
+            <a:ext cx="2880000" cy="1532904"/>
+          </a:xfrm>
+          <a:prstGeom prst="rect">
+            <a:avLst/>
+          </a:prstGeom>
+        </p:spPr>
+      </p:pic>
+      <p:pic>
+        <p:nvPicPr>
+          <p:cNvPr id="10" name="Imagem 9">
+            <a:extLst>
+              <a:ext uri="{FF2B5EF4-FFF2-40B4-BE49-F238E27FC236}">
+                <a16:creationId xmlns:a16="http://schemas.microsoft.com/office/drawing/2014/main" id="{1D610209-042D-75E0-8502-64F0BC20F4F7}"/>
+              </a:ext>
+            </a:extLst>
+          </p:cNvPr>
+          <p:cNvPicPr>
+            <a:picLocks noChangeAspect="1"/>
+          </p:cNvPicPr>
+          <p:nvPr/>
+        </p:nvPicPr>
+        <p:blipFill>
+          <a:blip r:embed="rId7"/>
+          <a:stretch>
+            <a:fillRect/>
+          </a:stretch>
+        </p:blipFill>
+        <p:spPr>
+          <a:xfrm>
+            <a:off x="8618841" y="4691652"/>
+            <a:ext cx="2620212" cy="1353665"/>
+          </a:xfrm>
+          <a:prstGeom prst="rect">
+            <a:avLst/>
+          </a:prstGeom>
+        </p:spPr>
+      </p:pic>
+    </p:spTree>
+    <p:extLst>
+      <p:ext uri="{BB962C8B-B14F-4D97-AF65-F5344CB8AC3E}">
+        <p14:creationId xmlns:p14="http://schemas.microsoft.com/office/powerpoint/2010/main" val="24746530"/>
+      </p:ext>
+    </p:extLst>
+  </p:cSld>
+  <p:clrMapOvr>
+    <a:masterClrMapping/>
+  </p:clrMapOvr>
+</p:sld>
+</file>
+
+<file path=ppt/slides/slide6.xml><?xml version="1.0" encoding="utf-8"?>
+<p:sld xmlns:a="http://schemas.openxmlformats.org/drawingml/2006/main" xmlns:r="http://schemas.openxmlformats.org/officeDocument/2006/relationships" xmlns:p="http://schemas.openxmlformats.org/presentationml/2006/main">
+  <p:cSld>
+    <p:spTree>
+      <p:nvGrpSpPr>
+        <p:cNvPr id="1" name=""/>
+        <p:cNvGrpSpPr/>
+        <p:nvPr/>
+      </p:nvGrpSpPr>
+      <p:grpSpPr>
+        <a:xfrm>
+          <a:off x="0" y="0"/>
+          <a:ext cx="0" cy="0"/>
+          <a:chOff x="0" y="0"/>
+          <a:chExt cx="0" cy="0"/>
+        </a:xfrm>
+      </p:grpSpPr>
+      <p:sp>
+        <p:nvSpPr>
+          <p:cNvPr id="2" name="Título 1">
+            <a:extLst>
+              <a:ext uri="{FF2B5EF4-FFF2-40B4-BE49-F238E27FC236}">
+                <a16:creationId xmlns:a16="http://schemas.microsoft.com/office/drawing/2014/main" id="{8F3844D5-9491-5F6A-F14E-F70549FDBC8E}"/>
+              </a:ext>
+            </a:extLst>
+          </p:cNvPr>
+          <p:cNvSpPr>
+            <a:spLocks noGrp="1"/>
+          </p:cNvSpPr>
+          <p:nvPr>
+            <p:ph type="title"/>
+          </p:nvPr>
+        </p:nvSpPr>
+        <p:spPr/>
+        <p:txBody>
+          <a:bodyPr/>
+          <a:lstStyle/>
+          <a:p>
+            <a:r>
+              <a:rPr lang="pt-BR" dirty="0"/>
+              <a:t>Servidor do Spring Boot</a:t>
+            </a:r>
+          </a:p>
+        </p:txBody>
+      </p:sp>
+      <p:sp>
+        <p:nvSpPr>
+          <p:cNvPr id="3" name="Espaço Reservado para Conteúdo 2">
+            <a:extLst>
+              <a:ext uri="{FF2B5EF4-FFF2-40B4-BE49-F238E27FC236}">
+                <a16:creationId xmlns:a16="http://schemas.microsoft.com/office/drawing/2014/main" id="{5D35FA6D-0F3F-AEEE-4C4C-C35CE646A3C6}"/>
+              </a:ext>
+            </a:extLst>
+          </p:cNvPr>
+          <p:cNvSpPr>
+            <a:spLocks noGrp="1"/>
+          </p:cNvSpPr>
+          <p:nvPr>
+            <p:ph idx="1"/>
+          </p:nvPr>
+        </p:nvSpPr>
+        <p:spPr>
+          <a:xfrm>
+            <a:off x="592347" y="1844675"/>
+            <a:ext cx="11007306" cy="1079680"/>
+          </a:xfrm>
+        </p:spPr>
+        <p:txBody>
+          <a:bodyPr/>
+          <a:lstStyle/>
+          <a:p>
+            <a:pPr algn="just"/>
+            <a:r>
+              <a:rPr lang="pt-BR" dirty="0"/>
+              <a:t>O Spring Boot utiliza servidores web embutidos, sendo o Apache </a:t>
+            </a:r>
+            <a:r>
+              <a:rPr lang="pt-BR" dirty="0" err="1"/>
+              <a:t>Tomcat</a:t>
+            </a:r>
+            <a:r>
+              <a:rPr lang="pt-BR" dirty="0"/>
+              <a:t> o mais comum, permitindo rodar aplicações de forma simples e rápida.</a:t>
+            </a:r>
+          </a:p>
+        </p:txBody>
+      </p:sp>
+      <p:pic>
+        <p:nvPicPr>
+          <p:cNvPr id="5" name="Imagem 4">
+            <a:extLst>
+              <a:ext uri="{FF2B5EF4-FFF2-40B4-BE49-F238E27FC236}">
+                <a16:creationId xmlns:a16="http://schemas.microsoft.com/office/drawing/2014/main" id="{D0A1A757-A9E5-C451-D0B4-2762A6BA56D1}"/>
+              </a:ext>
+            </a:extLst>
+          </p:cNvPr>
+          <p:cNvPicPr>
+            <a:picLocks noChangeAspect="1"/>
+          </p:cNvPicPr>
+          <p:nvPr/>
+        </p:nvPicPr>
+        <p:blipFill>
+          <a:blip r:embed="rId2">
+            <a:extLst>
+              <a:ext uri="{28A0092B-C50C-407E-A947-70E740481C1C}">
+                <a14:useLocalDpi xmlns:a14="http://schemas.microsoft.com/office/drawing/2010/main" val="0"/>
+              </a:ext>
+            </a:extLst>
+          </a:blip>
+          <a:stretch>
+            <a:fillRect/>
+          </a:stretch>
+        </p:blipFill>
+        <p:spPr>
+          <a:xfrm>
+            <a:off x="5560333" y="4069565"/>
+            <a:ext cx="1260000" cy="1260000"/>
+          </a:xfrm>
+          <a:prstGeom prst="rect">
+            <a:avLst/>
+          </a:prstGeom>
+        </p:spPr>
+      </p:pic>
+      <p:grpSp>
+        <p:nvGrpSpPr>
+          <p:cNvPr id="24" name="Agrupar 23">
+            <a:extLst>
+              <a:ext uri="{FF2B5EF4-FFF2-40B4-BE49-F238E27FC236}">
+                <a16:creationId xmlns:a16="http://schemas.microsoft.com/office/drawing/2014/main" id="{52D595CE-E404-B5FB-8101-183A3D46CB18}"/>
+              </a:ext>
+            </a:extLst>
+          </p:cNvPr>
+          <p:cNvGrpSpPr/>
+          <p:nvPr/>
+        </p:nvGrpSpPr>
+        <p:grpSpPr>
+          <a:xfrm>
+            <a:off x="10165039" y="3671675"/>
+            <a:ext cx="720000" cy="2079612"/>
+            <a:chOff x="10161473" y="3563967"/>
+            <a:chExt cx="720000" cy="2079612"/>
+          </a:xfrm>
+        </p:grpSpPr>
+        <p:pic>
+          <p:nvPicPr>
+            <p:cNvPr id="9" name="Imagem 8">
+              <a:extLst>
+                <a:ext uri="{FF2B5EF4-FFF2-40B4-BE49-F238E27FC236}">
+                  <a16:creationId xmlns:a16="http://schemas.microsoft.com/office/drawing/2014/main" id="{A5B1D27A-AB22-037A-050B-AC1C8A67ACEA}"/>
+                </a:ext>
+              </a:extLst>
+            </p:cNvPr>
+            <p:cNvPicPr>
+              <a:picLocks noChangeAspect="1"/>
+            </p:cNvPicPr>
+            <p:nvPr/>
+          </p:nvPicPr>
+          <p:blipFill>
+            <a:blip r:embed="rId3">
+              <a:extLst>
+                <a:ext uri="{28A0092B-C50C-407E-A947-70E740481C1C}">
+                  <a14:useLocalDpi xmlns:a14="http://schemas.microsoft.com/office/drawing/2010/main" val="0"/>
+                </a:ext>
+              </a:extLst>
+            </a:blip>
+            <a:stretch>
+              <a:fillRect/>
+            </a:stretch>
+          </p:blipFill>
+          <p:spPr>
+            <a:xfrm>
+              <a:off x="10161473" y="4923579"/>
+              <a:ext cx="720000" cy="720000"/>
+            </a:xfrm>
+            <a:prstGeom prst="rect">
+              <a:avLst/>
+            </a:prstGeom>
+          </p:spPr>
+        </p:pic>
+        <p:pic>
+          <p:nvPicPr>
+            <p:cNvPr id="11" name="Imagem 10">
+              <a:extLst>
+                <a:ext uri="{FF2B5EF4-FFF2-40B4-BE49-F238E27FC236}">
+                  <a16:creationId xmlns:a16="http://schemas.microsoft.com/office/drawing/2014/main" id="{DE4E8FAB-264F-05A4-3299-63C31D22236A}"/>
+                </a:ext>
+              </a:extLst>
+            </p:cNvPr>
+            <p:cNvPicPr>
+              <a:picLocks noChangeAspect="1"/>
+            </p:cNvPicPr>
+            <p:nvPr/>
+          </p:nvPicPr>
+          <p:blipFill>
+            <a:blip r:embed="rId4">
+              <a:extLst>
+                <a:ext uri="{28A0092B-C50C-407E-A947-70E740481C1C}">
+                  <a14:useLocalDpi xmlns:a14="http://schemas.microsoft.com/office/drawing/2010/main" val="0"/>
+                </a:ext>
+              </a:extLst>
+            </a:blip>
+            <a:stretch>
+              <a:fillRect/>
+            </a:stretch>
+          </p:blipFill>
+          <p:spPr>
+            <a:xfrm>
+              <a:off x="10161473" y="3563967"/>
+              <a:ext cx="720000" cy="720000"/>
+            </a:xfrm>
+            <a:prstGeom prst="rect">
+              <a:avLst/>
+            </a:prstGeom>
+          </p:spPr>
+        </p:pic>
+      </p:grpSp>
+      <p:pic>
+        <p:nvPicPr>
+          <p:cNvPr id="7" name="Imagem 6">
+            <a:extLst>
+              <a:ext uri="{FF2B5EF4-FFF2-40B4-BE49-F238E27FC236}">
+                <a16:creationId xmlns:a16="http://schemas.microsoft.com/office/drawing/2014/main" id="{F839134A-E7BE-5AB9-A9DA-0F8A83FD3602}"/>
+              </a:ext>
+            </a:extLst>
+          </p:cNvPr>
+          <p:cNvPicPr>
+            <a:picLocks noChangeAspect="1"/>
+          </p:cNvPicPr>
+          <p:nvPr/>
+        </p:nvPicPr>
+        <p:blipFill>
+          <a:blip r:embed="rId5">
+            <a:extLst>
+              <a:ext uri="{28A0092B-C50C-407E-A947-70E740481C1C}">
+                <a14:useLocalDpi xmlns:a14="http://schemas.microsoft.com/office/drawing/2010/main" val="0"/>
+              </a:ext>
+            </a:extLst>
+          </a:blip>
+          <a:stretch>
+            <a:fillRect/>
+          </a:stretch>
+        </p:blipFill>
+        <p:spPr>
+          <a:xfrm>
+            <a:off x="2420205" y="4069565"/>
+            <a:ext cx="1260000" cy="1260000"/>
+          </a:xfrm>
+          <a:prstGeom prst="rect">
+            <a:avLst/>
+          </a:prstGeom>
+        </p:spPr>
+      </p:pic>
+      <p:grpSp>
+        <p:nvGrpSpPr>
+          <p:cNvPr id="21" name="Agrupar 20">
+            <a:extLst>
+              <a:ext uri="{FF2B5EF4-FFF2-40B4-BE49-F238E27FC236}">
+                <a16:creationId xmlns:a16="http://schemas.microsoft.com/office/drawing/2014/main" id="{7106356C-C508-FA82-87A0-83BEFC91DE8B}"/>
+              </a:ext>
+            </a:extLst>
+          </p:cNvPr>
+          <p:cNvGrpSpPr/>
+          <p:nvPr/>
+        </p:nvGrpSpPr>
+        <p:grpSpPr>
+          <a:xfrm>
+            <a:off x="1186236" y="3419383"/>
+            <a:ext cx="1260000" cy="2584196"/>
+            <a:chOff x="1528243" y="3517649"/>
+            <a:chExt cx="1260000" cy="2584196"/>
+          </a:xfrm>
+        </p:grpSpPr>
+        <p:pic>
+          <p:nvPicPr>
+            <p:cNvPr id="13" name="Imagem 12">
+              <a:extLst>
+                <a:ext uri="{FF2B5EF4-FFF2-40B4-BE49-F238E27FC236}">
+                  <a16:creationId xmlns:a16="http://schemas.microsoft.com/office/drawing/2014/main" id="{1C5521F9-FB71-A863-D9E5-3D4A6C47DFB3}"/>
+                </a:ext>
+              </a:extLst>
+            </p:cNvPr>
+            <p:cNvPicPr>
+              <a:picLocks noChangeAspect="1"/>
+            </p:cNvPicPr>
+            <p:nvPr/>
+          </p:nvPicPr>
+          <p:blipFill>
+            <a:blip r:embed="rId6">
+              <a:extLst>
+                <a:ext uri="{28A0092B-C50C-407E-A947-70E740481C1C}">
+                  <a14:useLocalDpi xmlns:a14="http://schemas.microsoft.com/office/drawing/2010/main" val="0"/>
+                </a:ext>
+              </a:extLst>
+            </a:blip>
+            <a:stretch>
+              <a:fillRect/>
+            </a:stretch>
+          </p:blipFill>
+          <p:spPr>
+            <a:xfrm>
+              <a:off x="2068243" y="5381845"/>
+              <a:ext cx="720000" cy="720000"/>
+            </a:xfrm>
+            <a:prstGeom prst="rect">
+              <a:avLst/>
+            </a:prstGeom>
+          </p:spPr>
+        </p:pic>
+        <p:pic>
+          <p:nvPicPr>
+            <p:cNvPr id="15" name="Imagem 14">
+              <a:extLst>
+                <a:ext uri="{FF2B5EF4-FFF2-40B4-BE49-F238E27FC236}">
+                  <a16:creationId xmlns:a16="http://schemas.microsoft.com/office/drawing/2014/main" id="{28D5148B-D024-97F8-1EAE-989C58B5B132}"/>
+                </a:ext>
+              </a:extLst>
+            </p:cNvPr>
+            <p:cNvPicPr>
+              <a:picLocks noChangeAspect="1"/>
+            </p:cNvPicPr>
+            <p:nvPr/>
+          </p:nvPicPr>
+          <p:blipFill>
+            <a:blip r:embed="rId7">
+              <a:extLst>
+                <a:ext uri="{28A0092B-C50C-407E-A947-70E740481C1C}">
+                  <a14:useLocalDpi xmlns:a14="http://schemas.microsoft.com/office/drawing/2010/main" val="0"/>
+                </a:ext>
+              </a:extLst>
+            </a:blip>
+            <a:stretch>
+              <a:fillRect/>
+            </a:stretch>
+          </p:blipFill>
+          <p:spPr>
+            <a:xfrm>
+              <a:off x="2068243" y="3517649"/>
+              <a:ext cx="720000" cy="720000"/>
+            </a:xfrm>
+            <a:prstGeom prst="rect">
+              <a:avLst/>
+            </a:prstGeom>
+          </p:spPr>
+        </p:pic>
+        <p:pic>
+          <p:nvPicPr>
+            <p:cNvPr id="17" name="Imagem 16">
+              <a:extLst>
+                <a:ext uri="{FF2B5EF4-FFF2-40B4-BE49-F238E27FC236}">
+                  <a16:creationId xmlns:a16="http://schemas.microsoft.com/office/drawing/2014/main" id="{D2DB7C65-79C6-0F8E-B3D5-5CAFF0C478B1}"/>
+                </a:ext>
+              </a:extLst>
+            </p:cNvPr>
+            <p:cNvPicPr>
+              <a:picLocks noChangeAspect="1"/>
+            </p:cNvPicPr>
+            <p:nvPr/>
+          </p:nvPicPr>
+          <p:blipFill>
+            <a:blip r:embed="rId8">
+              <a:extLst>
+                <a:ext uri="{28A0092B-C50C-407E-A947-70E740481C1C}">
+                  <a14:useLocalDpi xmlns:a14="http://schemas.microsoft.com/office/drawing/2010/main" val="0"/>
+                </a:ext>
+              </a:extLst>
+            </a:blip>
+            <a:stretch>
+              <a:fillRect/>
+            </a:stretch>
+          </p:blipFill>
+          <p:spPr>
+            <a:xfrm>
+              <a:off x="1528243" y="4449747"/>
+              <a:ext cx="720000" cy="720000"/>
+            </a:xfrm>
+            <a:prstGeom prst="rect">
+              <a:avLst/>
+            </a:prstGeom>
+          </p:spPr>
+        </p:pic>
+      </p:grpSp>
+      <p:pic>
+        <p:nvPicPr>
+          <p:cNvPr id="19" name="Imagem 18">
+            <a:extLst>
+              <a:ext uri="{FF2B5EF4-FFF2-40B4-BE49-F238E27FC236}">
+                <a16:creationId xmlns:a16="http://schemas.microsoft.com/office/drawing/2014/main" id="{8A4DA2C8-55E0-E227-F8A0-45D6E3B8E986}"/>
+              </a:ext>
+            </a:extLst>
+          </p:cNvPr>
+          <p:cNvPicPr>
+            <a:picLocks noChangeAspect="1"/>
+          </p:cNvPicPr>
+          <p:nvPr/>
+        </p:nvPicPr>
+        <p:blipFill>
+          <a:blip r:embed="rId9">
+            <a:extLst>
+              <a:ext uri="{28A0092B-C50C-407E-A947-70E740481C1C}">
+                <a14:useLocalDpi xmlns:a14="http://schemas.microsoft.com/office/drawing/2010/main" val="0"/>
+              </a:ext>
+            </a:extLst>
+          </a:blip>
+          <a:stretch>
+            <a:fillRect/>
+          </a:stretch>
+        </p:blipFill>
+        <p:spPr>
+          <a:xfrm>
+            <a:off x="8700461" y="4069565"/>
+            <a:ext cx="1260000" cy="1260000"/>
+          </a:xfrm>
+          <a:prstGeom prst="rect">
+            <a:avLst/>
+          </a:prstGeom>
+        </p:spPr>
+      </p:pic>
+      <p:grpSp>
+        <p:nvGrpSpPr>
+          <p:cNvPr id="22" name="Agrupar 21">
+            <a:extLst>
+              <a:ext uri="{FF2B5EF4-FFF2-40B4-BE49-F238E27FC236}">
+                <a16:creationId xmlns:a16="http://schemas.microsoft.com/office/drawing/2014/main" id="{CC0980A5-D564-3623-39A7-904B7B201B60}"/>
+              </a:ext>
+            </a:extLst>
+          </p:cNvPr>
+          <p:cNvGrpSpPr/>
+          <p:nvPr/>
+        </p:nvGrpSpPr>
+        <p:grpSpPr>
+          <a:xfrm>
+            <a:off x="5156887" y="5643579"/>
+            <a:ext cx="2066892" cy="720000"/>
+            <a:chOff x="4917905" y="5643579"/>
+            <a:chExt cx="2066892" cy="720000"/>
+          </a:xfrm>
+        </p:grpSpPr>
+        <p:pic>
+          <p:nvPicPr>
+            <p:cNvPr id="20" name="Imagem 19" descr="Ícone&#10;&#10;O conteúdo gerado por IA pode estar incorreto.">
+              <a:extLst>
+                <a:ext uri="{FF2B5EF4-FFF2-40B4-BE49-F238E27FC236}">
+                  <a16:creationId xmlns:a16="http://schemas.microsoft.com/office/drawing/2014/main" id="{19FFCED6-CE77-2C6B-44C2-C002BEB5C745}"/>
+                </a:ext>
+              </a:extLst>
+            </p:cNvPr>
+            <p:cNvPicPr>
+              <a:picLocks noChangeAspect="1"/>
+            </p:cNvPicPr>
+            <p:nvPr/>
+          </p:nvPicPr>
+          <p:blipFill>
+            <a:blip r:embed="rId10">
+              <a:extLst>
+                <a:ext uri="{28A0092B-C50C-407E-A947-70E740481C1C}">
+                  <a14:useLocalDpi xmlns:a14="http://schemas.microsoft.com/office/drawing/2010/main" val="0"/>
+                </a:ext>
+              </a:extLst>
+            </a:blip>
+            <a:stretch>
+              <a:fillRect/>
+            </a:stretch>
+          </p:blipFill>
+          <p:spPr>
+            <a:xfrm>
+              <a:off x="4917905" y="5643579"/>
+              <a:ext cx="801128" cy="720000"/>
+            </a:xfrm>
+            <a:prstGeom prst="rect">
+              <a:avLst/>
+            </a:prstGeom>
+          </p:spPr>
+        </p:pic>
+        <p:pic>
+          <p:nvPicPr>
+            <p:cNvPr id="3074" name="Picture 2" descr="Apache Tomcat – Wikipédia, a enciclopédia livre">
+              <a:extLst>
+                <a:ext uri="{FF2B5EF4-FFF2-40B4-BE49-F238E27FC236}">
+                  <a16:creationId xmlns:a16="http://schemas.microsoft.com/office/drawing/2014/main" id="{DA128C6F-905C-5F57-CFAF-8C89CBD0566F}"/>
+                </a:ext>
+              </a:extLst>
+            </p:cNvPr>
+            <p:cNvPicPr>
+              <a:picLocks noChangeAspect="1" noChangeArrowheads="1"/>
+            </p:cNvPicPr>
+            <p:nvPr/>
+          </p:nvPicPr>
+          <p:blipFill>
+            <a:blip r:embed="rId11">
+              <a:extLst>
+                <a:ext uri="{28A0092B-C50C-407E-A947-70E740481C1C}">
+                  <a14:useLocalDpi xmlns:a14="http://schemas.microsoft.com/office/drawing/2010/main" val="0"/>
+                </a:ext>
+              </a:extLst>
+            </a:blip>
+            <a:srcRect/>
+            <a:stretch>
+              <a:fillRect/>
+            </a:stretch>
+          </p:blipFill>
+          <p:spPr bwMode="auto">
+            <a:xfrm>
+              <a:off x="5974297" y="5643579"/>
+              <a:ext cx="1010500" cy="720000"/>
+            </a:xfrm>
+            <a:prstGeom prst="rect">
+              <a:avLst/>
+            </a:prstGeom>
+            <a:noFill/>
+            <a:extLst>
+              <a:ext uri="{909E8E84-426E-40DD-AFC4-6F175D3DCCD1}">
+                <a14:hiddenFill xmlns:a14="http://schemas.microsoft.com/office/drawing/2010/main">
+                  <a:solidFill>
+                    <a:srgbClr val="FFFFFF"/>
+                  </a:solidFill>
+                </a14:hiddenFill>
+              </a:ext>
+            </a:extLst>
+          </p:spPr>
+        </p:pic>
+      </p:grpSp>
+      <p:cxnSp>
+        <p:nvCxnSpPr>
+          <p:cNvPr id="26" name="Conector de Seta Reta 25">
+            <a:extLst>
+              <a:ext uri="{FF2B5EF4-FFF2-40B4-BE49-F238E27FC236}">
+                <a16:creationId xmlns:a16="http://schemas.microsoft.com/office/drawing/2014/main" id="{559BC0AE-4E89-0FD9-D952-39319995F3A9}"/>
+              </a:ext>
+            </a:extLst>
+          </p:cNvPr>
+          <p:cNvCxnSpPr/>
+          <p:nvPr/>
+        </p:nvCxnSpPr>
+        <p:spPr>
+          <a:xfrm>
+            <a:off x="3819525" y="4391675"/>
+            <a:ext cx="1634650" cy="0"/>
+          </a:xfrm>
+          <a:prstGeom prst="straightConnector1">
+            <a:avLst/>
+          </a:prstGeom>
+          <a:ln w="38100">
+            <a:solidFill>
+              <a:schemeClr val="tx1"/>
+            </a:solidFill>
+            <a:tailEnd type="triangle"/>
+          </a:ln>
+        </p:spPr>
+        <p:style>
+          <a:lnRef idx="1">
+            <a:schemeClr val="accent1"/>
+          </a:lnRef>
+          <a:fillRef idx="0">
+            <a:schemeClr val="accent1"/>
+          </a:fillRef>
+          <a:effectRef idx="0">
+            <a:schemeClr val="accent1"/>
+          </a:effectRef>
+          <a:fontRef idx="minor">
+            <a:schemeClr val="tx1"/>
+          </a:fontRef>
+        </p:style>
+      </p:cxnSp>
+      <p:cxnSp>
+        <p:nvCxnSpPr>
+          <p:cNvPr id="28" name="Conector de Seta Reta 27">
+            <a:extLst>
+              <a:ext uri="{FF2B5EF4-FFF2-40B4-BE49-F238E27FC236}">
+                <a16:creationId xmlns:a16="http://schemas.microsoft.com/office/drawing/2014/main" id="{5932B8AE-276E-3F7F-50E8-AB072FF710FE}"/>
+              </a:ext>
+            </a:extLst>
+          </p:cNvPr>
+          <p:cNvCxnSpPr>
+            <a:cxnSpLocks/>
+          </p:cNvCxnSpPr>
+          <p:nvPr/>
+        </p:nvCxnSpPr>
+        <p:spPr>
+          <a:xfrm flipH="1">
+            <a:off x="3819525" y="4829175"/>
+            <a:ext cx="1552575" cy="0"/>
+          </a:xfrm>
+          <a:prstGeom prst="straightConnector1">
+            <a:avLst/>
+          </a:prstGeom>
+          <a:ln w="38100">
+            <a:solidFill>
+              <a:schemeClr val="tx1"/>
+            </a:solidFill>
+            <a:tailEnd type="triangle"/>
+          </a:ln>
+        </p:spPr>
+        <p:style>
+          <a:lnRef idx="1">
+            <a:schemeClr val="accent1"/>
+          </a:lnRef>
+          <a:fillRef idx="0">
+            <a:schemeClr val="accent1"/>
+          </a:fillRef>
+          <a:effectRef idx="0">
+            <a:schemeClr val="accent1"/>
+          </a:effectRef>
+          <a:fontRef idx="minor">
+            <a:schemeClr val="tx1"/>
+          </a:fontRef>
+        </p:style>
+      </p:cxnSp>
+      <p:sp>
+        <p:nvSpPr>
+          <p:cNvPr id="31" name="CaixaDeTexto 30">
+            <a:extLst>
+              <a:ext uri="{FF2B5EF4-FFF2-40B4-BE49-F238E27FC236}">
+                <a16:creationId xmlns:a16="http://schemas.microsoft.com/office/drawing/2014/main" id="{605EB39C-7560-B867-0D02-05E520E47938}"/>
+              </a:ext>
+            </a:extLst>
+          </p:cNvPr>
+          <p:cNvSpPr txBox="1"/>
+          <p:nvPr/>
+        </p:nvSpPr>
+        <p:spPr>
+          <a:xfrm>
+            <a:off x="4082539" y="3884899"/>
+            <a:ext cx="1178528" cy="369332"/>
+          </a:xfrm>
+          <a:prstGeom prst="rect">
+            <a:avLst/>
+          </a:prstGeom>
+          <a:noFill/>
+        </p:spPr>
+        <p:txBody>
+          <a:bodyPr wrap="none" rtlCol="0">
+            <a:spAutoFit/>
+          </a:bodyPr>
+          <a:lstStyle/>
+          <a:p>
+            <a:r>
+              <a:rPr lang="pt-BR" dirty="0">
+                <a:latin typeface="Times New Roman" panose="02020603050405020304" pitchFamily="18" charset="0"/>
+                <a:cs typeface="Times New Roman" panose="02020603050405020304" pitchFamily="18" charset="0"/>
+              </a:rPr>
+              <a:t>API REST</a:t>
+            </a:r>
+          </a:p>
+        </p:txBody>
+      </p:sp>
+      <p:cxnSp>
+        <p:nvCxnSpPr>
+          <p:cNvPr id="32" name="Conector de Seta Reta 31">
+            <a:extLst>
+              <a:ext uri="{FF2B5EF4-FFF2-40B4-BE49-F238E27FC236}">
+                <a16:creationId xmlns:a16="http://schemas.microsoft.com/office/drawing/2014/main" id="{E46BD5CE-2526-9AA0-0E42-2266E1F88628}"/>
+              </a:ext>
+            </a:extLst>
+          </p:cNvPr>
+          <p:cNvCxnSpPr>
+            <a:cxnSpLocks/>
+          </p:cNvCxnSpPr>
+          <p:nvPr/>
+        </p:nvCxnSpPr>
+        <p:spPr>
+          <a:xfrm>
+            <a:off x="7008566" y="4440178"/>
+            <a:ext cx="1634650" cy="0"/>
+          </a:xfrm>
+          <a:prstGeom prst="straightConnector1">
+            <a:avLst/>
+          </a:prstGeom>
+          <a:ln w="38100">
+            <a:solidFill>
+              <a:schemeClr val="tx1"/>
+            </a:solidFill>
+            <a:tailEnd type="triangle"/>
+          </a:ln>
+        </p:spPr>
+        <p:style>
+          <a:lnRef idx="1">
+            <a:schemeClr val="accent1"/>
+          </a:lnRef>
+          <a:fillRef idx="0">
+            <a:schemeClr val="accent1"/>
+          </a:fillRef>
+          <a:effectRef idx="0">
+            <a:schemeClr val="accent1"/>
+          </a:effectRef>
+          <a:fontRef idx="minor">
+            <a:schemeClr val="tx1"/>
+          </a:fontRef>
+        </p:style>
+      </p:cxnSp>
+      <p:cxnSp>
+        <p:nvCxnSpPr>
+          <p:cNvPr id="33" name="Conector de Seta Reta 32">
+            <a:extLst>
+              <a:ext uri="{FF2B5EF4-FFF2-40B4-BE49-F238E27FC236}">
+                <a16:creationId xmlns:a16="http://schemas.microsoft.com/office/drawing/2014/main" id="{AD42E04F-8919-E53A-4869-46388234B3FA}"/>
+              </a:ext>
+            </a:extLst>
+          </p:cNvPr>
+          <p:cNvCxnSpPr>
+            <a:cxnSpLocks/>
+          </p:cNvCxnSpPr>
+          <p:nvPr/>
+        </p:nvCxnSpPr>
+        <p:spPr>
+          <a:xfrm flipH="1">
+            <a:off x="7008566" y="4877678"/>
+            <a:ext cx="1552575" cy="0"/>
+          </a:xfrm>
+          <a:prstGeom prst="straightConnector1">
+            <a:avLst/>
+          </a:prstGeom>
+          <a:ln w="38100">
+            <a:solidFill>
+              <a:schemeClr val="tx1"/>
+            </a:solidFill>
+            <a:tailEnd type="triangle"/>
+          </a:ln>
+        </p:spPr>
+        <p:style>
+          <a:lnRef idx="1">
+            <a:schemeClr val="accent1"/>
+          </a:lnRef>
+          <a:fillRef idx="0">
+            <a:schemeClr val="accent1"/>
+          </a:fillRef>
+          <a:effectRef idx="0">
+            <a:schemeClr val="accent1"/>
+          </a:effectRef>
+          <a:fontRef idx="minor">
+            <a:schemeClr val="tx1"/>
+          </a:fontRef>
+        </p:style>
+      </p:cxnSp>
+      <p:sp>
+        <p:nvSpPr>
+          <p:cNvPr id="34" name="CaixaDeTexto 33">
+            <a:extLst>
+              <a:ext uri="{FF2B5EF4-FFF2-40B4-BE49-F238E27FC236}">
+                <a16:creationId xmlns:a16="http://schemas.microsoft.com/office/drawing/2014/main" id="{8A85420E-F71D-0AF6-2B1F-144DE5EE232D}"/>
+              </a:ext>
+            </a:extLst>
+          </p:cNvPr>
+          <p:cNvSpPr txBox="1"/>
+          <p:nvPr/>
+        </p:nvSpPr>
+        <p:spPr>
+          <a:xfrm>
+            <a:off x="6923400" y="3884899"/>
+            <a:ext cx="1703993" cy="369332"/>
+          </a:xfrm>
+          <a:prstGeom prst="rect">
+            <a:avLst/>
+          </a:prstGeom>
+          <a:noFill/>
+        </p:spPr>
+        <p:txBody>
+          <a:bodyPr wrap="none" rtlCol="0">
+            <a:spAutoFit/>
+          </a:bodyPr>
+          <a:lstStyle/>
+          <a:p>
+            <a:r>
+              <a:rPr lang="pt-BR" dirty="0" err="1">
+                <a:latin typeface="Times New Roman" panose="02020603050405020304" pitchFamily="18" charset="0"/>
+                <a:cs typeface="Times New Roman" panose="02020603050405020304" pitchFamily="18" charset="0"/>
+              </a:rPr>
+              <a:t>Hibernate</a:t>
+            </a:r>
+            <a:r>
+              <a:rPr lang="pt-BR" dirty="0">
+                <a:latin typeface="Times New Roman" panose="02020603050405020304" pitchFamily="18" charset="0"/>
+                <a:cs typeface="Times New Roman" panose="02020603050405020304" pitchFamily="18" charset="0"/>
+              </a:rPr>
+              <a:t> + JPA</a:t>
+            </a:r>
+          </a:p>
+        </p:txBody>
+      </p:sp>
+    </p:spTree>
+    <p:extLst>
+      <p:ext uri="{BB962C8B-B14F-4D97-AF65-F5344CB8AC3E}">
+        <p14:creationId xmlns:p14="http://schemas.microsoft.com/office/powerpoint/2010/main" val="3360964943"/>
+      </p:ext>
+    </p:extLst>
+  </p:cSld>
+  <p:clrMapOvr>
+    <a:masterClrMapping/>
+  </p:clrMapOvr>
+</p:sld>
+</file>
+
+<file path=ppt/slides/slide7.xml><?xml version="1.0" encoding="utf-8"?>
+<p:sld xmlns:a="http://schemas.openxmlformats.org/drawingml/2006/main" xmlns:r="http://schemas.openxmlformats.org/officeDocument/2006/relationships" xmlns:p="http://schemas.openxmlformats.org/presentationml/2006/main">
+  <p:cSld>
+    <p:spTree>
+      <p:nvGrpSpPr>
+        <p:cNvPr id="1" name=""/>
+        <p:cNvGrpSpPr/>
+        <p:nvPr/>
+      </p:nvGrpSpPr>
+      <p:grpSpPr>
+        <a:xfrm>
+          <a:off x="0" y="0"/>
+          <a:ext cx="0" cy="0"/>
+          <a:chOff x="0" y="0"/>
+          <a:chExt cx="0" cy="0"/>
+        </a:xfrm>
+      </p:grpSpPr>
+      <p:sp>
+        <p:nvSpPr>
+          <p:cNvPr id="2" name="Título 1">
+            <a:extLst>
+              <a:ext uri="{FF2B5EF4-FFF2-40B4-BE49-F238E27FC236}">
+                <a16:creationId xmlns:a16="http://schemas.microsoft.com/office/drawing/2014/main" id="{BA4C3388-B91A-1A44-6CDD-E63A9B2D880C}"/>
+              </a:ext>
+            </a:extLst>
+          </p:cNvPr>
+          <p:cNvSpPr>
+            <a:spLocks noGrp="1"/>
+          </p:cNvSpPr>
+          <p:nvPr>
+            <p:ph type="title"/>
+          </p:nvPr>
+        </p:nvSpPr>
+        <p:spPr/>
+        <p:txBody>
+          <a:bodyPr/>
+          <a:lstStyle/>
+          <a:p>
+            <a:r>
+              <a:rPr lang="pt-BR" dirty="0"/>
+              <a:t>O que é uma API </a:t>
+            </a:r>
+            <a:r>
+              <a:rPr lang="pt-BR" dirty="0" err="1"/>
+              <a:t>RESTful</a:t>
+            </a:r>
+            <a:r>
+              <a:rPr lang="pt-BR" dirty="0"/>
+              <a:t> ?</a:t>
+            </a:r>
+          </a:p>
+        </p:txBody>
+      </p:sp>
+      <p:sp>
+        <p:nvSpPr>
+          <p:cNvPr id="3" name="Espaço Reservado para Conteúdo 2">
+            <a:extLst>
+              <a:ext uri="{FF2B5EF4-FFF2-40B4-BE49-F238E27FC236}">
+                <a16:creationId xmlns:a16="http://schemas.microsoft.com/office/drawing/2014/main" id="{EBEA13BD-DC6A-251F-DDF3-AA656C6AB926}"/>
+              </a:ext>
+            </a:extLst>
+          </p:cNvPr>
+          <p:cNvSpPr>
+            <a:spLocks noGrp="1"/>
+          </p:cNvSpPr>
+          <p:nvPr>
+            <p:ph idx="1"/>
+          </p:nvPr>
+        </p:nvSpPr>
+        <p:spPr/>
+        <p:txBody>
+          <a:bodyPr/>
+          <a:lstStyle/>
+          <a:p>
+            <a:pPr algn="just"/>
+            <a:r>
+              <a:rPr lang="pt-BR" dirty="0"/>
+              <a:t>Uma </a:t>
+            </a:r>
+            <a:r>
+              <a:rPr lang="pt-BR" b="1" dirty="0"/>
+              <a:t>API </a:t>
+            </a:r>
+            <a:r>
+              <a:rPr lang="pt-BR" b="1" dirty="0" err="1"/>
+              <a:t>RESTful</a:t>
+            </a:r>
+            <a:r>
+              <a:rPr lang="pt-BR" dirty="0"/>
+              <a:t> é uma interface que permite a comunicação entre sistemas usando o padrão </a:t>
+            </a:r>
+            <a:r>
+              <a:rPr lang="pt-BR" b="1" dirty="0"/>
+              <a:t>REST (</a:t>
+            </a:r>
+            <a:r>
+              <a:rPr lang="pt-BR" b="1" dirty="0" err="1"/>
+              <a:t>Representational</a:t>
+            </a:r>
+            <a:r>
+              <a:rPr lang="pt-BR" b="1" dirty="0"/>
+              <a:t> </a:t>
+            </a:r>
+            <a:r>
+              <a:rPr lang="pt-BR" b="1" dirty="0" err="1"/>
+              <a:t>State</a:t>
+            </a:r>
+            <a:r>
+              <a:rPr lang="pt-BR" b="1" dirty="0"/>
+              <a:t> </a:t>
+            </a:r>
+            <a:r>
+              <a:rPr lang="pt-BR" b="1" dirty="0" err="1"/>
+              <a:t>Transfer</a:t>
+            </a:r>
+            <a:r>
+              <a:rPr lang="pt-BR" b="1" dirty="0"/>
+              <a:t>)</a:t>
+            </a:r>
+            <a:r>
+              <a:rPr lang="pt-BR" dirty="0"/>
+              <a:t> sobre o protocolo </a:t>
+            </a:r>
+            <a:r>
+              <a:rPr lang="pt-BR" b="1" dirty="0"/>
+              <a:t>HTTP</a:t>
+            </a:r>
+            <a:r>
+              <a:rPr lang="pt-BR" dirty="0"/>
+              <a:t>.</a:t>
+            </a:r>
+          </a:p>
+          <a:p>
+            <a:pPr marL="1028700" lvl="1" indent="-342900" algn="just">
+              <a:spcAft>
+                <a:spcPts val="500"/>
+              </a:spcAft>
+            </a:pPr>
+            <a:r>
+              <a:rPr lang="pt-BR" b="1" dirty="0"/>
+              <a:t>Uso do HTTP </a:t>
+            </a:r>
+            <a:r>
+              <a:rPr lang="pt-BR" dirty="0"/>
+              <a:t>→ Métodos como GET, POST, PUT, DELETE</a:t>
+            </a:r>
+          </a:p>
+          <a:p>
+            <a:pPr marL="1028700" lvl="1" indent="-342900" algn="just">
+              <a:spcAft>
+                <a:spcPts val="500"/>
+              </a:spcAft>
+            </a:pPr>
+            <a:r>
+              <a:rPr lang="pt-BR" b="1" dirty="0" err="1"/>
+              <a:t>Stateless</a:t>
+            </a:r>
+            <a:r>
+              <a:rPr lang="pt-BR" dirty="0"/>
+              <a:t> → Cada requisição é independente, ou seja, o servidor não armazena informações de requisições anteriores.</a:t>
+            </a:r>
+          </a:p>
+          <a:p>
+            <a:pPr marL="1028700" lvl="1" indent="-342900" algn="just">
+              <a:spcAft>
+                <a:spcPts val="500"/>
+              </a:spcAft>
+            </a:pPr>
+            <a:r>
+              <a:rPr lang="pt-BR" b="1" dirty="0"/>
+              <a:t>Recursos (URL) </a:t>
+            </a:r>
+            <a:r>
+              <a:rPr lang="pt-BR" dirty="0"/>
+              <a:t>→ Tudo é tratado como recurso e acessado por meio de URLs, como /clientes, /produtos ou /pedidos.</a:t>
+            </a:r>
+          </a:p>
+          <a:p>
+            <a:pPr marL="1028700" lvl="1" indent="-342900" algn="just">
+              <a:spcAft>
+                <a:spcPts val="500"/>
+              </a:spcAft>
+            </a:pPr>
+            <a:r>
+              <a:rPr lang="pt-BR" b="1" dirty="0"/>
+              <a:t>JSON</a:t>
+            </a:r>
+            <a:r>
+              <a:rPr lang="pt-BR" dirty="0"/>
+              <a:t> → Formato padrão de troca de dados</a:t>
+            </a:r>
+          </a:p>
+          <a:p>
+            <a:pPr marL="1028700" lvl="1" indent="-342900" algn="just">
+              <a:spcAft>
+                <a:spcPts val="500"/>
+              </a:spcAft>
+            </a:pPr>
+            <a:r>
+              <a:rPr lang="pt-BR" b="1" dirty="0"/>
+              <a:t>Cliente-Servidor </a:t>
+            </a:r>
+            <a:r>
+              <a:rPr lang="pt-BR" dirty="0"/>
+              <a:t>→ O front-</a:t>
+            </a:r>
+            <a:r>
+              <a:rPr lang="pt-BR" dirty="0" err="1"/>
+              <a:t>end</a:t>
+            </a:r>
+            <a:r>
+              <a:rPr lang="pt-BR" dirty="0"/>
+              <a:t> (interface) e o </a:t>
+            </a:r>
+            <a:r>
+              <a:rPr lang="pt-BR" dirty="0" err="1"/>
+              <a:t>back-end</a:t>
+            </a:r>
+            <a:r>
+              <a:rPr lang="pt-BR" dirty="0"/>
+              <a:t> (regras de negócio) funcionam de forma independente, permitindo maior flexibilidade no desenvolvimento.</a:t>
+            </a:r>
+          </a:p>
+        </p:txBody>
+      </p:sp>
+    </p:spTree>
+    <p:extLst>
+      <p:ext uri="{BB962C8B-B14F-4D97-AF65-F5344CB8AC3E}">
+        <p14:creationId xmlns:p14="http://schemas.microsoft.com/office/powerpoint/2010/main" val="2985090178"/>
+      </p:ext>
+    </p:extLst>
+  </p:cSld>
+  <p:clrMapOvr>
+    <a:masterClrMapping/>
+  </p:clrMapOvr>
+</p:sld>
+</file>
+
+<file path=ppt/slides/slide8.xml><?xml version="1.0" encoding="utf-8"?>
+<p:sld xmlns:a="http://schemas.openxmlformats.org/drawingml/2006/main" xmlns:r="http://schemas.openxmlformats.org/officeDocument/2006/relationships" xmlns:p="http://schemas.openxmlformats.org/presentationml/2006/main">
+  <p:cSld>
+    <p:spTree>
+      <p:nvGrpSpPr>
+        <p:cNvPr id="1" name=""/>
+        <p:cNvGrpSpPr/>
+        <p:nvPr/>
+      </p:nvGrpSpPr>
+      <p:grpSpPr>
+        <a:xfrm>
+          <a:off x="0" y="0"/>
+          <a:ext cx="0" cy="0"/>
+          <a:chOff x="0" y="0"/>
+          <a:chExt cx="0" cy="0"/>
+        </a:xfrm>
+      </p:grpSpPr>
+      <p:sp>
+        <p:nvSpPr>
+          <p:cNvPr id="2" name="Título 1">
+            <a:extLst>
+              <a:ext uri="{FF2B5EF4-FFF2-40B4-BE49-F238E27FC236}">
+                <a16:creationId xmlns:a16="http://schemas.microsoft.com/office/drawing/2014/main" id="{57EF1B89-8067-CFDB-C3C9-B75F43870AA3}"/>
+              </a:ext>
+            </a:extLst>
+          </p:cNvPr>
+          <p:cNvSpPr>
+            <a:spLocks noGrp="1"/>
+          </p:cNvSpPr>
+          <p:nvPr>
+            <p:ph type="title"/>
+          </p:nvPr>
+        </p:nvSpPr>
+        <p:spPr/>
+        <p:txBody>
+          <a:bodyPr/>
+          <a:lstStyle/>
+          <a:p>
+            <a:r>
+              <a:rPr lang="pt-BR" dirty="0"/>
+              <a:t>Protocolo HTTP</a:t>
+            </a:r>
+          </a:p>
+        </p:txBody>
+      </p:sp>
+      <p:sp>
+        <p:nvSpPr>
+          <p:cNvPr id="3" name="Espaço Reservado para Conteúdo 2">
+            <a:extLst>
+              <a:ext uri="{FF2B5EF4-FFF2-40B4-BE49-F238E27FC236}">
+                <a16:creationId xmlns:a16="http://schemas.microsoft.com/office/drawing/2014/main" id="{6C2B44EE-61E2-3A39-A2EE-88FC9282A899}"/>
+              </a:ext>
+            </a:extLst>
+          </p:cNvPr>
+          <p:cNvSpPr>
+            <a:spLocks noGrp="1"/>
+          </p:cNvSpPr>
+          <p:nvPr>
+            <p:ph idx="1"/>
+          </p:nvPr>
+        </p:nvSpPr>
+        <p:spPr>
+          <a:xfrm>
+            <a:off x="592347" y="1844675"/>
+            <a:ext cx="11007306" cy="1584325"/>
+          </a:xfrm>
+        </p:spPr>
+        <p:txBody>
+          <a:bodyPr/>
+          <a:lstStyle/>
+          <a:p>
+            <a:pPr algn="just"/>
+            <a:r>
+              <a:rPr lang="pt-BR" dirty="0"/>
+              <a:t>O </a:t>
+            </a:r>
+            <a:r>
+              <a:rPr lang="pt-BR" b="1" dirty="0"/>
+              <a:t>HTTP</a:t>
+            </a:r>
+            <a:r>
+              <a:rPr lang="pt-BR" dirty="0"/>
+              <a:t> (Protocolo de Transferência de Hipertexto) é um protocolo de comunicação utilizado para transferir dados na web, funcionando por meio de </a:t>
+            </a:r>
+            <a:r>
+              <a:rPr lang="pt-BR" b="1" dirty="0"/>
+              <a:t>requisições enviadas pelo cliente ao servidor</a:t>
+            </a:r>
+            <a:r>
+              <a:rPr lang="pt-BR" dirty="0"/>
+              <a:t>, que processa a solicitação e retorna uma resposta com os dados desejados.</a:t>
+            </a:r>
+          </a:p>
+          <a:p>
+            <a:endParaRPr lang="pt-BR" dirty="0"/>
+          </a:p>
+        </p:txBody>
+      </p:sp>
+      <p:pic>
+        <p:nvPicPr>
+          <p:cNvPr id="4" name="Imagem 3">
+            <a:extLst>
+              <a:ext uri="{FF2B5EF4-FFF2-40B4-BE49-F238E27FC236}">
+                <a16:creationId xmlns:a16="http://schemas.microsoft.com/office/drawing/2014/main" id="{396BD025-D23B-F808-F871-5075AF3F626E}"/>
+              </a:ext>
+            </a:extLst>
+          </p:cNvPr>
+          <p:cNvPicPr>
+            <a:picLocks noChangeAspect="1"/>
+          </p:cNvPicPr>
+          <p:nvPr/>
+        </p:nvPicPr>
+        <p:blipFill>
+          <a:blip r:embed="rId2">
+            <a:extLst>
+              <a:ext uri="{28A0092B-C50C-407E-A947-70E740481C1C}">
+                <a14:useLocalDpi xmlns:a14="http://schemas.microsoft.com/office/drawing/2010/main" val="0"/>
+              </a:ext>
+            </a:extLst>
+          </a:blip>
+          <a:stretch>
+            <a:fillRect/>
+          </a:stretch>
+        </p:blipFill>
+        <p:spPr>
+          <a:xfrm>
+            <a:off x="6931933" y="4155348"/>
+            <a:ext cx="1260000" cy="1260000"/>
+          </a:xfrm>
+          <a:prstGeom prst="rect">
+            <a:avLst/>
+          </a:prstGeom>
+        </p:spPr>
+      </p:pic>
+      <p:pic>
+        <p:nvPicPr>
+          <p:cNvPr id="5" name="Imagem 4">
+            <a:extLst>
+              <a:ext uri="{FF2B5EF4-FFF2-40B4-BE49-F238E27FC236}">
+                <a16:creationId xmlns:a16="http://schemas.microsoft.com/office/drawing/2014/main" id="{F061D8ED-005E-0E9A-47C8-489E5F614D31}"/>
+              </a:ext>
+            </a:extLst>
+          </p:cNvPr>
+          <p:cNvPicPr>
+            <a:picLocks noChangeAspect="1"/>
+          </p:cNvPicPr>
+          <p:nvPr/>
+        </p:nvPicPr>
+        <p:blipFill>
+          <a:blip r:embed="rId3">
+            <a:extLst>
+              <a:ext uri="{28A0092B-C50C-407E-A947-70E740481C1C}">
+                <a14:useLocalDpi xmlns:a14="http://schemas.microsoft.com/office/drawing/2010/main" val="0"/>
+              </a:ext>
+            </a:extLst>
+          </a:blip>
+          <a:stretch>
+            <a:fillRect/>
+          </a:stretch>
+        </p:blipFill>
+        <p:spPr>
+          <a:xfrm>
+            <a:off x="3791805" y="4155348"/>
+            <a:ext cx="1260000" cy="1260000"/>
+          </a:xfrm>
+          <a:prstGeom prst="rect">
+            <a:avLst/>
+          </a:prstGeom>
+        </p:spPr>
+      </p:pic>
+      <p:cxnSp>
+        <p:nvCxnSpPr>
+          <p:cNvPr id="6" name="Conector de Seta Reta 5">
+            <a:extLst>
+              <a:ext uri="{FF2B5EF4-FFF2-40B4-BE49-F238E27FC236}">
+                <a16:creationId xmlns:a16="http://schemas.microsoft.com/office/drawing/2014/main" id="{851E303F-5598-EC66-A538-9152F0B4B327}"/>
+              </a:ext>
+            </a:extLst>
+          </p:cNvPr>
+          <p:cNvCxnSpPr>
+            <a:cxnSpLocks/>
+          </p:cNvCxnSpPr>
+          <p:nvPr/>
+        </p:nvCxnSpPr>
+        <p:spPr>
+          <a:xfrm>
+            <a:off x="5191125" y="4477458"/>
+            <a:ext cx="1634650" cy="0"/>
+          </a:xfrm>
+          <a:prstGeom prst="straightConnector1">
+            <a:avLst/>
+          </a:prstGeom>
+          <a:ln w="38100">
+            <a:solidFill>
+              <a:schemeClr val="tx1"/>
+            </a:solidFill>
+            <a:tailEnd type="triangle"/>
+          </a:ln>
+        </p:spPr>
+        <p:style>
+          <a:lnRef idx="1">
+            <a:schemeClr val="accent1"/>
+          </a:lnRef>
+          <a:fillRef idx="0">
+            <a:schemeClr val="accent1"/>
+          </a:fillRef>
+          <a:effectRef idx="0">
+            <a:schemeClr val="accent1"/>
+          </a:effectRef>
+          <a:fontRef idx="minor">
+            <a:schemeClr val="tx1"/>
+          </a:fontRef>
+        </p:style>
+      </p:cxnSp>
+      <p:cxnSp>
+        <p:nvCxnSpPr>
+          <p:cNvPr id="7" name="Conector de Seta Reta 6">
+            <a:extLst>
+              <a:ext uri="{FF2B5EF4-FFF2-40B4-BE49-F238E27FC236}">
+                <a16:creationId xmlns:a16="http://schemas.microsoft.com/office/drawing/2014/main" id="{E94F68EF-F01F-5D27-7764-9456761D6A21}"/>
+              </a:ext>
+            </a:extLst>
+          </p:cNvPr>
+          <p:cNvCxnSpPr>
+            <a:cxnSpLocks/>
+          </p:cNvCxnSpPr>
+          <p:nvPr/>
+        </p:nvCxnSpPr>
+        <p:spPr>
+          <a:xfrm flipH="1">
+            <a:off x="5191125" y="4914958"/>
+            <a:ext cx="1552575" cy="0"/>
+          </a:xfrm>
+          <a:prstGeom prst="straightConnector1">
+            <a:avLst/>
+          </a:prstGeom>
+          <a:ln w="38100">
+            <a:solidFill>
+              <a:schemeClr val="tx1"/>
+            </a:solidFill>
+            <a:tailEnd type="triangle"/>
+          </a:ln>
+        </p:spPr>
+        <p:style>
+          <a:lnRef idx="1">
+            <a:schemeClr val="accent1"/>
+          </a:lnRef>
+          <a:fillRef idx="0">
+            <a:schemeClr val="accent1"/>
+          </a:fillRef>
+          <a:effectRef idx="0">
+            <a:schemeClr val="accent1"/>
+          </a:effectRef>
+          <a:fontRef idx="minor">
+            <a:schemeClr val="tx1"/>
+          </a:fontRef>
+        </p:style>
+      </p:cxnSp>
+      <p:sp>
+        <p:nvSpPr>
+          <p:cNvPr id="8" name="CaixaDeTexto 7">
+            <a:extLst>
+              <a:ext uri="{FF2B5EF4-FFF2-40B4-BE49-F238E27FC236}">
+                <a16:creationId xmlns:a16="http://schemas.microsoft.com/office/drawing/2014/main" id="{0BCD32E1-9343-690E-63C5-23278FFC17BB}"/>
+              </a:ext>
+            </a:extLst>
+          </p:cNvPr>
+          <p:cNvSpPr txBox="1"/>
+          <p:nvPr/>
+        </p:nvSpPr>
+        <p:spPr>
+          <a:xfrm>
+            <a:off x="5627577" y="3970682"/>
+            <a:ext cx="761747" cy="369332"/>
+          </a:xfrm>
+          <a:prstGeom prst="rect">
+            <a:avLst/>
+          </a:prstGeom>
+          <a:noFill/>
+        </p:spPr>
+        <p:txBody>
+          <a:bodyPr wrap="none" rtlCol="0">
+            <a:spAutoFit/>
+          </a:bodyPr>
+          <a:lstStyle/>
+          <a:p>
+            <a:r>
+              <a:rPr lang="pt-BR" dirty="0">
+                <a:latin typeface="Times New Roman" panose="02020603050405020304" pitchFamily="18" charset="0"/>
+                <a:cs typeface="Times New Roman" panose="02020603050405020304" pitchFamily="18" charset="0"/>
+              </a:rPr>
+              <a:t>HTTP</a:t>
+            </a:r>
+          </a:p>
+        </p:txBody>
+      </p:sp>
+      <p:sp>
+        <p:nvSpPr>
+          <p:cNvPr id="9" name="CaixaDeTexto 8">
+            <a:extLst>
+              <a:ext uri="{FF2B5EF4-FFF2-40B4-BE49-F238E27FC236}">
+                <a16:creationId xmlns:a16="http://schemas.microsoft.com/office/drawing/2014/main" id="{98405DD7-1F7C-A7D2-109A-E3667E256EC1}"/>
+              </a:ext>
+            </a:extLst>
+          </p:cNvPr>
+          <p:cNvSpPr txBox="1"/>
+          <p:nvPr/>
+        </p:nvSpPr>
+        <p:spPr>
+          <a:xfrm>
+            <a:off x="3996047" y="5465978"/>
+            <a:ext cx="851515" cy="369332"/>
+          </a:xfrm>
+          <a:prstGeom prst="rect">
+            <a:avLst/>
+          </a:prstGeom>
+          <a:noFill/>
+        </p:spPr>
+        <p:txBody>
+          <a:bodyPr wrap="none" rtlCol="0">
+            <a:spAutoFit/>
+          </a:bodyPr>
+          <a:lstStyle/>
+          <a:p>
+            <a:r>
+              <a:rPr lang="pt-BR" dirty="0">
+                <a:latin typeface="Times New Roman" panose="02020603050405020304" pitchFamily="18" charset="0"/>
+                <a:cs typeface="Times New Roman" panose="02020603050405020304" pitchFamily="18" charset="0"/>
+              </a:rPr>
+              <a:t>Cliente</a:t>
+            </a:r>
+          </a:p>
+        </p:txBody>
+      </p:sp>
+      <p:sp>
+        <p:nvSpPr>
+          <p:cNvPr id="10" name="CaixaDeTexto 9">
+            <a:extLst>
+              <a:ext uri="{FF2B5EF4-FFF2-40B4-BE49-F238E27FC236}">
+                <a16:creationId xmlns:a16="http://schemas.microsoft.com/office/drawing/2014/main" id="{24E776F2-5B8F-BAEC-0A3D-E0025351012B}"/>
+              </a:ext>
+            </a:extLst>
+          </p:cNvPr>
+          <p:cNvSpPr txBox="1"/>
+          <p:nvPr/>
+        </p:nvSpPr>
+        <p:spPr>
+          <a:xfrm>
+            <a:off x="7072055" y="5465978"/>
+            <a:ext cx="979755" cy="369332"/>
+          </a:xfrm>
+          <a:prstGeom prst="rect">
+            <a:avLst/>
+          </a:prstGeom>
+          <a:noFill/>
+        </p:spPr>
+        <p:txBody>
+          <a:bodyPr wrap="none" rtlCol="0">
+            <a:spAutoFit/>
+          </a:bodyPr>
+          <a:lstStyle/>
+          <a:p>
+            <a:r>
+              <a:rPr lang="pt-BR" dirty="0">
+                <a:latin typeface="Times New Roman" panose="02020603050405020304" pitchFamily="18" charset="0"/>
+                <a:cs typeface="Times New Roman" panose="02020603050405020304" pitchFamily="18" charset="0"/>
+              </a:rPr>
+              <a:t>Servidor</a:t>
+            </a:r>
+          </a:p>
+        </p:txBody>
+      </p:sp>
+    </p:spTree>
+    <p:extLst>
+      <p:ext uri="{BB962C8B-B14F-4D97-AF65-F5344CB8AC3E}">
+        <p14:creationId xmlns:p14="http://schemas.microsoft.com/office/powerpoint/2010/main" val="896867950"/>
+      </p:ext>
+    </p:extLst>
+  </p:cSld>
+  <p:clrMapOvr>
+    <a:masterClrMapping/>
+  </p:clrMapOvr>
+</p:sld>
+</file>
+
+<file path=ppt/slides/slide9.xml><?xml version="1.0" encoding="utf-8"?>
+<p:sld xmlns:a="http://schemas.openxmlformats.org/drawingml/2006/main" xmlns:r="http://schemas.openxmlformats.org/officeDocument/2006/relationships" xmlns:p="http://schemas.openxmlformats.org/presentationml/2006/main">
+  <p:cSld>
+    <p:spTree>
+      <p:nvGrpSpPr>
+        <p:cNvPr id="1" name=""/>
+        <p:cNvGrpSpPr/>
+        <p:nvPr/>
+      </p:nvGrpSpPr>
+      <p:grpSpPr>
+        <a:xfrm>
+          <a:off x="0" y="0"/>
+          <a:ext cx="0" cy="0"/>
+          <a:chOff x="0" y="0"/>
+          <a:chExt cx="0" cy="0"/>
+        </a:xfrm>
+      </p:grpSpPr>
+      <p:sp>
+        <p:nvSpPr>
+          <p:cNvPr id="2" name="Título 1">
+            <a:extLst>
+              <a:ext uri="{FF2B5EF4-FFF2-40B4-BE49-F238E27FC236}">
+                <a16:creationId xmlns:a16="http://schemas.microsoft.com/office/drawing/2014/main" id="{E99C2FE8-6D7C-6FB8-7B13-FC5592C902F2}"/>
+              </a:ext>
+            </a:extLst>
+          </p:cNvPr>
+          <p:cNvSpPr>
+            <a:spLocks noGrp="1"/>
+          </p:cNvSpPr>
+          <p:nvPr>
+            <p:ph type="title"/>
+          </p:nvPr>
+        </p:nvSpPr>
+        <p:spPr/>
+        <p:txBody>
+          <a:bodyPr/>
+          <a:lstStyle/>
+          <a:p>
+            <a:r>
+              <a:rPr lang="pt-BR" dirty="0"/>
+              <a:t>Cabeçalho de requisição do Protocolo HTTP</a:t>
+            </a:r>
+          </a:p>
+        </p:txBody>
+      </p:sp>
+      <p:sp>
+        <p:nvSpPr>
+          <p:cNvPr id="3" name="Espaço Reservado para Conteúdo 2">
+            <a:extLst>
+              <a:ext uri="{FF2B5EF4-FFF2-40B4-BE49-F238E27FC236}">
+                <a16:creationId xmlns:a16="http://schemas.microsoft.com/office/drawing/2014/main" id="{71E2F91A-38A8-0AC9-75B7-CE43CAEEFDCC}"/>
+              </a:ext>
+            </a:extLst>
+          </p:cNvPr>
+          <p:cNvSpPr>
+            <a:spLocks noGrp="1"/>
+          </p:cNvSpPr>
+          <p:nvPr>
+            <p:ph idx="1"/>
+          </p:nvPr>
+        </p:nvSpPr>
+        <p:spPr>
+          <a:xfrm>
+            <a:off x="592347" y="1844675"/>
+            <a:ext cx="11007306" cy="1098550"/>
+          </a:xfrm>
+        </p:spPr>
+        <p:txBody>
+          <a:bodyPr/>
+          <a:lstStyle/>
+          <a:p>
+            <a:r>
+              <a:rPr lang="pt-BR" dirty="0"/>
+              <a:t>O cabeçalho de uma requisição no </a:t>
+            </a:r>
+            <a:r>
+              <a:rPr lang="pt-BR" b="1" dirty="0"/>
+              <a:t>HTTP</a:t>
+            </a:r>
+            <a:r>
+              <a:rPr lang="pt-BR" dirty="0"/>
+              <a:t> contém </a:t>
+            </a:r>
+            <a:r>
+              <a:rPr lang="pt-BR" b="1" dirty="0"/>
+              <a:t>informações adicionais (metadados)</a:t>
+            </a:r>
+            <a:r>
+              <a:rPr lang="pt-BR" dirty="0"/>
+              <a:t> que ajudam o servidor a entender </a:t>
+            </a:r>
+            <a:r>
+              <a:rPr lang="pt-BR" b="1" dirty="0"/>
+              <a:t>como processar a requisição</a:t>
+            </a:r>
+            <a:r>
+              <a:rPr lang="pt-BR" dirty="0"/>
+              <a:t>.</a:t>
+            </a:r>
+          </a:p>
+          <a:p>
+            <a:endParaRPr lang="pt-BR" dirty="0"/>
+          </a:p>
+        </p:txBody>
+      </p:sp>
+      <p:pic>
+        <p:nvPicPr>
+          <p:cNvPr id="5122" name="Picture 2">
+            <a:extLst>
+              <a:ext uri="{FF2B5EF4-FFF2-40B4-BE49-F238E27FC236}">
+                <a16:creationId xmlns:a16="http://schemas.microsoft.com/office/drawing/2014/main" id="{368154DF-40C5-02A5-C23F-2A641350407B}"/>
+              </a:ext>
+            </a:extLst>
+          </p:cNvPr>
+          <p:cNvPicPr>
+            <a:picLocks noChangeAspect="1" noChangeArrowheads="1"/>
+          </p:cNvPicPr>
+          <p:nvPr/>
+        </p:nvPicPr>
+        <p:blipFill>
+          <a:blip r:embed="rId2">
+            <a:extLst>
+              <a:ext uri="{28A0092B-C50C-407E-A947-70E740481C1C}">
+                <a14:useLocalDpi xmlns:a14="http://schemas.microsoft.com/office/drawing/2010/main" val="0"/>
+              </a:ext>
+            </a:extLst>
+          </a:blip>
+          <a:srcRect/>
+          <a:stretch>
+            <a:fillRect/>
+          </a:stretch>
+        </p:blipFill>
+        <p:spPr bwMode="auto">
+          <a:xfrm>
+            <a:off x="2591411" y="3240842"/>
+            <a:ext cx="6372225" cy="2869991"/>
+          </a:xfrm>
+          <a:prstGeom prst="rect">
+            <a:avLst/>
+          </a:prstGeom>
+          <a:noFill/>
+          <a:extLst>
+            <a:ext uri="{909E8E84-426E-40DD-AFC4-6F175D3DCCD1}">
+              <a14:hiddenFill xmlns:a14="http://schemas.microsoft.com/office/drawing/2010/main">
+                <a:solidFill>
+                  <a:srgbClr val="FFFFFF"/>
+                </a:solidFill>
+              </a14:hiddenFill>
+            </a:ext>
+          </a:extLst>
+        </p:spPr>
+      </p:pic>
+    </p:spTree>
+    <p:extLst>
+      <p:ext uri="{BB962C8B-B14F-4D97-AF65-F5344CB8AC3E}">
+        <p14:creationId xmlns:p14="http://schemas.microsoft.com/office/powerpoint/2010/main" val="1252733121"/>
       </p:ext>
     </p:extLst>
   </p:cSld>
@@ -5149,6 +8052,15 @@
 </file>
 
 <file path=customXml/item2.xml><?xml version="1.0" encoding="utf-8"?>
+<?mso-contentType ?>
+<FormTemplates xmlns="http://schemas.microsoft.com/sharepoint/v3/contenttype/forms">
+  <Display>DocumentLibraryForm</Display>
+  <Edit>DocumentLibraryForm</Edit>
+  <New>DocumentLibraryForm</New>
+</FormTemplates>
+</file>
+
+<file path=customXml/item3.xml><?xml version="1.0" encoding="utf-8"?>
 <ct:contentTypeSchema xmlns:ct="http://schemas.microsoft.com/office/2006/metadata/contentType" xmlns:ma="http://schemas.microsoft.com/office/2006/metadata/properties/metaAttributes" ct:_="" ma:_="" ma:contentTypeName="Documento" ma:contentTypeID="0x010100FC747262AEFF6E47A3CB051106D2382E" ma:contentTypeVersion="7" ma:contentTypeDescription="Crie um novo documento." ma:contentTypeScope="" ma:versionID="c252a372321bb20a146a92d630e83497">
   <xsd:schema xmlns:xsd="http://www.w3.org/2001/XMLSchema" xmlns:xs="http://www.w3.org/2001/XMLSchema" xmlns:p="http://schemas.microsoft.com/office/2006/metadata/properties" xmlns:ns2="adbca637-b409-402b-9852-6cf3890dd3c6" targetNamespace="http://schemas.microsoft.com/office/2006/metadata/properties" ma:root="true" ma:fieldsID="3e9113f952ce2a4df8b21a287312ae4d" ns2:_="">
     <xsd:import namespace="adbca637-b409-402b-9852-6cf3890dd3c6"/>
@@ -5310,15 +8222,6 @@
 </ct:contentTypeSchema>
 </file>
 
-<file path=customXml/item3.xml><?xml version="1.0" encoding="utf-8"?>
-<?mso-contentType ?>
-<FormTemplates xmlns="http://schemas.microsoft.com/sharepoint/v3/contenttype/forms">
-  <Display>DocumentLibraryForm</Display>
-  <Edit>DocumentLibraryForm</Edit>
-  <New>DocumentLibraryForm</New>
-</FormTemplates>
-</file>
-
 <file path=customXml/itemProps1.xml><?xml version="1.0" encoding="utf-8"?>
 <ds:datastoreItem xmlns:ds="http://schemas.openxmlformats.org/officeDocument/2006/customXml" ds:itemID="{44AA641E-A36E-40C4-ABAC-AE8B4CD4DD79}">
   <ds:schemaRefs>
@@ -5329,6 +8232,14 @@
 </file>
 
 <file path=customXml/itemProps2.xml><?xml version="1.0" encoding="utf-8"?>
+<ds:datastoreItem xmlns:ds="http://schemas.openxmlformats.org/officeDocument/2006/customXml" ds:itemID="{7BA82208-FFF8-4F32-9CA5-4822B26C310B}">
+  <ds:schemaRefs>
+    <ds:schemaRef ds:uri="http://schemas.microsoft.com/sharepoint/v3/contenttype/forms"/>
+  </ds:schemaRefs>
+</ds:datastoreItem>
+</file>
+
+<file path=customXml/itemProps3.xml><?xml version="1.0" encoding="utf-8"?>
 <ds:datastoreItem xmlns:ds="http://schemas.openxmlformats.org/officeDocument/2006/customXml" ds:itemID="{923FF897-DC32-4170-B5D6-85E604CF9203}">
   <ds:schemaRefs>
     <ds:schemaRef ds:uri="http://schemas.microsoft.com/office/2006/metadata/contentType"/>
@@ -5344,12 +8255,4 @@
     <ds:schemaRef ds:uri="http://schemas.microsoft.com/internal/obd"/>
   </ds:schemaRefs>
 </ds:datastoreItem>
-</file>
-
-<file path=customXml/itemProps3.xml><?xml version="1.0" encoding="utf-8"?>
-<ds:datastoreItem xmlns:ds="http://schemas.openxmlformats.org/officeDocument/2006/customXml" ds:itemID="{7BA82208-FFF8-4F32-9CA5-4822B26C310B}">
-  <ds:schemaRefs>
-    <ds:schemaRef ds:uri="http://schemas.microsoft.com/sharepoint/v3/contenttype/forms"/>
-  </ds:schemaRefs>
-</ds:datastoreItem>
 </file>
--- a/Projeto de Software e Segurança da Informação - 2026/Projeto de Software/Aula12-Spring Boot/Aula Inaugural - 10 grupos.pptx
+++ b/Projeto de Software e Segurança da Informação - 2026/Projeto de Software/Aula12-Spring Boot/Aula Inaugural - 10 grupos.pptx
@@ -5,10 +5,10 @@
     <p:sldMasterId id="2147483677" r:id="rId4"/>
   </p:sldMasterIdLst>
   <p:notesMasterIdLst>
-    <p:notesMasterId r:id="rId18"/>
+    <p:notesMasterId r:id="rId20"/>
   </p:notesMasterIdLst>
   <p:handoutMasterIdLst>
-    <p:handoutMasterId r:id="rId19"/>
+    <p:handoutMasterId r:id="rId21"/>
   </p:handoutMasterIdLst>
   <p:sldIdLst>
     <p:sldId id="256" r:id="rId5"/>
@@ -24,6 +24,8 @@
     <p:sldId id="267" r:id="rId15"/>
     <p:sldId id="268" r:id="rId16"/>
     <p:sldId id="265" r:id="rId17"/>
+    <p:sldId id="269" r:id="rId18"/>
+    <p:sldId id="270" r:id="rId19"/>
   </p:sldIdLst>
   <p:sldSz cx="12192000" cy="6858000"/>
   <p:notesSz cx="6858000" cy="9144000"/>
@@ -4478,11 +4480,11 @@
             </a:pPr>
             <a:r>
               <a:rPr lang="pt-BR" b="1" dirty="0"/>
-              <a:t>Método </a:t>
-            </a:r>
-            <a:r>
-              <a:rPr lang="pt-BR" dirty="0"/>
-              <a:t>→ Define qual método será utilizado, como por exemplo o método POST.</a:t>
+              <a:t>Versão </a:t>
+            </a:r>
+            <a:r>
+              <a:rPr lang="pt-BR" dirty="0"/>
+              <a:t>→ Indica a versão do protocolo HTTP, como no exemplo a versão 1.1.</a:t>
             </a:r>
           </a:p>
           <a:p>
@@ -4493,11 +4495,11 @@
             </a:pPr>
             <a:r>
               <a:rPr lang="pt-BR" b="1" dirty="0"/>
-              <a:t>URI </a:t>
-            </a:r>
-            <a:r>
-              <a:rPr lang="pt-BR" dirty="0"/>
-              <a:t>→ Define onde a requisição será aplicada no servidor.</a:t>
+              <a:t>Status </a:t>
+            </a:r>
+            <a:r>
+              <a:rPr lang="pt-BR" dirty="0"/>
+              <a:t>→ Define se a requisição foi concluída com sucesso.</a:t>
             </a:r>
           </a:p>
           <a:p>
@@ -4508,11 +4510,11 @@
             </a:pPr>
             <a:r>
               <a:rPr lang="pt-BR" b="1" dirty="0"/>
-              <a:t>Versão </a:t>
-            </a:r>
-            <a:r>
-              <a:rPr lang="pt-BR" dirty="0"/>
-              <a:t>→ Indica a versão do protocolo HTTP, como no exemplo a versão 1.1.</a:t>
+              <a:t>Date</a:t>
+            </a:r>
+            <a:r>
+              <a:rPr lang="pt-BR" dirty="0"/>
+              <a:t> → Indica o momento exato em que a resposta foi gerada pelo servidor. </a:t>
             </a:r>
           </a:p>
           <a:p>
@@ -4523,11 +4525,11 @@
             </a:pPr>
             <a:r>
               <a:rPr lang="pt-BR" b="1" dirty="0"/>
-              <a:t>Host</a:t>
-            </a:r>
-            <a:r>
-              <a:rPr lang="pt-BR" dirty="0"/>
-              <a:t> → Informa o endereço do servidor que vai receber a requisição e a porta que será utilizada.</a:t>
+              <a:t>Server </a:t>
+            </a:r>
+            <a:r>
+              <a:rPr lang="pt-BR" dirty="0"/>
+              <a:t>→ Identifica o software que o servidor está rodando.</a:t>
             </a:r>
           </a:p>
           <a:p>
@@ -4537,20 +4539,12 @@
               </a:spcAft>
             </a:pPr>
             <a:r>
-              <a:rPr lang="pt-BR" b="1" dirty="0"/>
-              <a:t>Connection</a:t>
-            </a:r>
-            <a:r>
-              <a:rPr lang="pt-BR" dirty="0"/>
-              <a:t> → Define se a conexão deve permanecer aberta, no </a:t>
-            </a:r>
-            <a:r>
-              <a:rPr lang="pt-BR" dirty="0" err="1"/>
-              <a:t>keep-alive</a:t>
-            </a:r>
-            <a:r>
-              <a:rPr lang="pt-BR" dirty="0"/>
-              <a:t> define que a conexão deve ser mantida aberta.</a:t>
+              <a:rPr lang="pt-BR" b="1" dirty="0" err="1"/>
+              <a:t>Content-Type</a:t>
+            </a:r>
+            <a:r>
+              <a:rPr lang="pt-BR" dirty="0"/>
+              <a:t> → Indica o tipo de dado enviado no corpo da requisição, como por exemplo o HTML.</a:t>
             </a:r>
           </a:p>
           <a:p>
@@ -4560,21 +4554,6 @@
               </a:spcAft>
             </a:pPr>
             <a:r>
-              <a:rPr lang="pt-BR" b="1" dirty="0" err="1"/>
-              <a:t>Content-Type</a:t>
-            </a:r>
-            <a:r>
-              <a:rPr lang="pt-BR" dirty="0"/>
-              <a:t> → Indica o tipo de dado enviado no corpo da requisição, como por exemplo o JSON.</a:t>
-            </a:r>
-          </a:p>
-          <a:p>
-            <a:pPr marL="1028700" lvl="1" indent="-342900" algn="just">
-              <a:spcAft>
-                <a:spcPts val="500"/>
-              </a:spcAft>
-            </a:pPr>
-            <a:r>
               <a:rPr lang="pt-BR" b="1" dirty="0"/>
               <a:t>Corpo (body) </a:t>
             </a:r>
@@ -4584,7 +4563,15 @@
             </a:r>
             <a:r>
               <a:rPr lang="pt-BR" b="1" dirty="0"/>
-              <a:t>dados enviados para o servidor</a:t>
+              <a:t>dados</a:t>
+            </a:r>
+            <a:r>
+              <a:rPr lang="pt-BR" dirty="0"/>
+              <a:t> </a:t>
+            </a:r>
+            <a:r>
+              <a:rPr lang="pt-BR" b="1" dirty="0"/>
+              <a:t>retornados do servidor</a:t>
             </a:r>
             <a:r>
               <a:rPr lang="pt-BR" dirty="0"/>
@@ -4669,7 +4656,7 @@
           <a:p>
             <a:r>
               <a:rPr lang="pt-BR" dirty="0"/>
-              <a:t>Cabeçalho de resposta do Protocolo HTTP</a:t>
+              <a:t>Status de Resposta</a:t>
             </a:r>
           </a:p>
         </p:txBody>
@@ -4694,6 +4681,64 @@
         <p:txBody>
           <a:bodyPr/>
           <a:lstStyle/>
+          <a:p>
+            <a:pPr algn="just"/>
+            <a:r>
+              <a:rPr lang="pt-BR" dirty="0"/>
+              <a:t>Os status de retorno do </a:t>
+            </a:r>
+            <a:r>
+              <a:rPr lang="pt-BR" b="1" dirty="0"/>
+              <a:t>HTTP</a:t>
+            </a:r>
+            <a:r>
+              <a:rPr lang="pt-BR" dirty="0"/>
+              <a:t> indicam o resultado da requisição e são organizados em cinco classes pelo primeiro dígito, permitindo que o cliente trate respostas e apresente mensagens adequadas ao usuário. Os códigos de status são divididos em grupos como apresentados a seguir:</a:t>
+            </a:r>
+          </a:p>
+          <a:p>
+            <a:pPr marL="1028700" lvl="1" indent="-342900"/>
+            <a:r>
+              <a:rPr lang="pt-BR" b="1" dirty="0"/>
+              <a:t>1xx — Informação</a:t>
+            </a:r>
+            <a:endParaRPr lang="pt-BR" dirty="0"/>
+          </a:p>
+          <a:p>
+            <a:pPr marL="1028700" lvl="1" indent="-342900"/>
+            <a:r>
+              <a:rPr lang="pt-BR" b="1" dirty="0"/>
+              <a:t>2xx — Sucesso</a:t>
+            </a:r>
+            <a:endParaRPr lang="pt-BR" dirty="0"/>
+          </a:p>
+          <a:p>
+            <a:pPr marL="1028700" lvl="1" indent="-342900"/>
+            <a:r>
+              <a:rPr lang="pt-BR" b="1" dirty="0"/>
+              <a:t>3xx — Redirecionamento</a:t>
+            </a:r>
+            <a:endParaRPr lang="pt-BR" dirty="0"/>
+          </a:p>
+          <a:p>
+            <a:pPr marL="1028700" lvl="1" indent="-342900"/>
+            <a:r>
+              <a:rPr lang="pt-BR" b="1" dirty="0"/>
+              <a:t>4xx — Erro do cliente</a:t>
+            </a:r>
+            <a:endParaRPr lang="pt-BR" dirty="0"/>
+          </a:p>
+          <a:p>
+            <a:pPr marL="1028700" lvl="1" indent="-342900"/>
+            <a:r>
+              <a:rPr lang="pt-BR" b="1" dirty="0"/>
+              <a:t>5xx — Erro do servidor</a:t>
+            </a:r>
+            <a:endParaRPr lang="pt-BR" dirty="0"/>
+          </a:p>
+          <a:p>
+            <a:endParaRPr lang="pt-BR" dirty="0"/>
+          </a:p>
           <a:p>
             <a:endParaRPr lang="pt-BR" dirty="0"/>
           </a:p>
@@ -4703,6 +4748,315 @@
     <p:extLst>
       <p:ext uri="{BB962C8B-B14F-4D97-AF65-F5344CB8AC3E}">
         <p14:creationId xmlns:p14="http://schemas.microsoft.com/office/powerpoint/2010/main" val="598368988"/>
+      </p:ext>
+    </p:extLst>
+  </p:cSld>
+  <p:clrMapOvr>
+    <a:masterClrMapping/>
+  </p:clrMapOvr>
+</p:sld>
+</file>
+
+<file path=ppt/slides/slide14.xml><?xml version="1.0" encoding="utf-8"?>
+<p:sld xmlns:a="http://schemas.openxmlformats.org/drawingml/2006/main" xmlns:r="http://schemas.openxmlformats.org/officeDocument/2006/relationships" xmlns:p="http://schemas.openxmlformats.org/presentationml/2006/main">
+  <p:cSld>
+    <p:spTree>
+      <p:nvGrpSpPr>
+        <p:cNvPr id="1" name=""/>
+        <p:cNvGrpSpPr/>
+        <p:nvPr/>
+      </p:nvGrpSpPr>
+      <p:grpSpPr>
+        <a:xfrm>
+          <a:off x="0" y="0"/>
+          <a:ext cx="0" cy="0"/>
+          <a:chOff x="0" y="0"/>
+          <a:chExt cx="0" cy="0"/>
+        </a:xfrm>
+      </p:grpSpPr>
+      <p:sp>
+        <p:nvSpPr>
+          <p:cNvPr id="2" name="Título 1">
+            <a:extLst>
+              <a:ext uri="{FF2B5EF4-FFF2-40B4-BE49-F238E27FC236}">
+                <a16:creationId xmlns:a16="http://schemas.microsoft.com/office/drawing/2014/main" id="{400CECFD-DD83-A369-0027-B462FBD87E9F}"/>
+              </a:ext>
+            </a:extLst>
+          </p:cNvPr>
+          <p:cNvSpPr>
+            <a:spLocks noGrp="1"/>
+          </p:cNvSpPr>
+          <p:nvPr>
+            <p:ph type="title"/>
+          </p:nvPr>
+        </p:nvSpPr>
+        <p:spPr/>
+        <p:txBody>
+          <a:bodyPr/>
+          <a:lstStyle/>
+          <a:p>
+            <a:r>
+              <a:rPr lang="pt-BR" dirty="0"/>
+              <a:t>Códigos mais comuns</a:t>
+            </a:r>
+          </a:p>
+        </p:txBody>
+      </p:sp>
+      <p:sp>
+        <p:nvSpPr>
+          <p:cNvPr id="3" name="Espaço Reservado para Conteúdo 2">
+            <a:extLst>
+              <a:ext uri="{FF2B5EF4-FFF2-40B4-BE49-F238E27FC236}">
+                <a16:creationId xmlns:a16="http://schemas.microsoft.com/office/drawing/2014/main" id="{36F03BD0-ACFF-BE4B-1280-1479522B5C06}"/>
+              </a:ext>
+            </a:extLst>
+          </p:cNvPr>
+          <p:cNvSpPr>
+            <a:spLocks noGrp="1"/>
+          </p:cNvSpPr>
+          <p:nvPr>
+            <p:ph idx="1"/>
+          </p:nvPr>
+        </p:nvSpPr>
+        <p:spPr/>
+        <p:txBody>
+          <a:bodyPr/>
+          <a:lstStyle/>
+          <a:p>
+            <a:r>
+              <a:rPr lang="pt-BR" dirty="0"/>
+              <a:t>Alguns códigos em cada grupo são usados com mais frequência, consequentemente, mais conhecidos que os demais, por exemplo:</a:t>
+            </a:r>
+          </a:p>
+          <a:p>
+            <a:pPr marL="1028700" lvl="1" indent="-342900"/>
+            <a:r>
+              <a:rPr lang="pt-BR" b="1" dirty="0"/>
+              <a:t>200 OK</a:t>
+            </a:r>
+            <a:r>
+              <a:rPr lang="pt-BR" dirty="0"/>
+              <a:t>: A requisição foi atendida com sucesso.</a:t>
+            </a:r>
+          </a:p>
+          <a:p>
+            <a:pPr marL="1028700" lvl="1" indent="-342900"/>
+            <a:r>
+              <a:rPr lang="pt-BR" b="1" dirty="0"/>
+              <a:t>400 </a:t>
+            </a:r>
+            <a:r>
+              <a:rPr lang="pt-BR" b="1" dirty="0" err="1"/>
+              <a:t>Bad</a:t>
+            </a:r>
+            <a:r>
+              <a:rPr lang="pt-BR" b="1" dirty="0"/>
+              <a:t> </a:t>
+            </a:r>
+            <a:r>
+              <a:rPr lang="pt-BR" b="1" dirty="0" err="1"/>
+              <a:t>Request</a:t>
+            </a:r>
+            <a:r>
+              <a:rPr lang="pt-BR" dirty="0"/>
+              <a:t>: A requisição está mal formada e não pode ser entendida pelo servidor.</a:t>
+            </a:r>
+          </a:p>
+          <a:p>
+            <a:pPr marL="1028700" lvl="1" indent="-342900"/>
+            <a:r>
+              <a:rPr lang="pt-BR" b="1" dirty="0"/>
+              <a:t>403 </a:t>
+            </a:r>
+            <a:r>
+              <a:rPr lang="pt-BR" b="1" dirty="0" err="1"/>
+              <a:t>Forbidden</a:t>
+            </a:r>
+            <a:r>
+              <a:rPr lang="pt-BR" dirty="0"/>
+              <a:t>: Usuário não autorizado a fazer a operação requisitada.</a:t>
+            </a:r>
+          </a:p>
+          <a:p>
+            <a:pPr marL="1028700" lvl="1" indent="-342900"/>
+            <a:r>
+              <a:rPr lang="pt-BR" b="1" dirty="0"/>
+              <a:t>404 </a:t>
+            </a:r>
+            <a:r>
+              <a:rPr lang="pt-BR" b="1" dirty="0" err="1"/>
+              <a:t>Not</a:t>
+            </a:r>
+            <a:r>
+              <a:rPr lang="pt-BR" b="1" dirty="0"/>
+              <a:t> </a:t>
+            </a:r>
+            <a:r>
+              <a:rPr lang="pt-BR" b="1" dirty="0" err="1"/>
+              <a:t>Found</a:t>
+            </a:r>
+            <a:r>
+              <a:rPr lang="pt-BR" dirty="0"/>
+              <a:t>: O recurso requisitado não pode ser encontrado na URI informada.</a:t>
+            </a:r>
+          </a:p>
+          <a:p>
+            <a:pPr marL="1028700" lvl="1" indent="-342900"/>
+            <a:r>
+              <a:rPr lang="pt-BR" b="1" dirty="0"/>
+              <a:t>405 </a:t>
+            </a:r>
+            <a:r>
+              <a:rPr lang="pt-BR" b="1" dirty="0" err="1"/>
+              <a:t>Method</a:t>
+            </a:r>
+            <a:r>
+              <a:rPr lang="pt-BR" b="1" dirty="0"/>
+              <a:t> </a:t>
+            </a:r>
+            <a:r>
+              <a:rPr lang="pt-BR" b="1" dirty="0" err="1"/>
+              <a:t>Not</a:t>
+            </a:r>
+            <a:r>
+              <a:rPr lang="pt-BR" b="1" dirty="0"/>
+              <a:t> </a:t>
+            </a:r>
+            <a:r>
+              <a:rPr lang="pt-BR" b="1" dirty="0" err="1"/>
+              <a:t>Allowed</a:t>
+            </a:r>
+            <a:r>
+              <a:rPr lang="pt-BR" dirty="0"/>
+              <a:t>: O método utilizado na requisição não é permitido no recurso especificado.</a:t>
+            </a:r>
+          </a:p>
+          <a:p>
+            <a:pPr marL="1028700" lvl="1" indent="-342900"/>
+            <a:r>
+              <a:rPr lang="pt-BR" b="1" dirty="0"/>
+              <a:t>500 </a:t>
+            </a:r>
+            <a:r>
+              <a:rPr lang="pt-BR" b="1" dirty="0" err="1"/>
+              <a:t>Internal</a:t>
+            </a:r>
+            <a:r>
+              <a:rPr lang="pt-BR" b="1" dirty="0"/>
+              <a:t> Server Error</a:t>
+            </a:r>
+            <a:r>
+              <a:rPr lang="pt-BR" dirty="0"/>
+              <a:t>: O servidor encontrou uma condição inesperada que o impede de executar a requisição.</a:t>
+            </a:r>
+          </a:p>
+          <a:p>
+            <a:pPr marL="1028700" lvl="1" indent="-342900"/>
+            <a:r>
+              <a:rPr lang="pt-BR" b="1" dirty="0"/>
+              <a:t>503 Service </a:t>
+            </a:r>
+            <a:r>
+              <a:rPr lang="pt-BR" b="1" dirty="0" err="1"/>
+              <a:t>Unavailable</a:t>
+            </a:r>
+            <a:r>
+              <a:rPr lang="pt-BR" dirty="0"/>
+              <a:t>: O servidor está temporariamente indisponível, normalmente devido a sobrecarga ou manutenção</a:t>
+            </a:r>
+          </a:p>
+          <a:p>
+            <a:br>
+              <a:rPr lang="pt-BR" dirty="0"/>
+            </a:br>
+            <a:endParaRPr lang="pt-BR" dirty="0"/>
+          </a:p>
+        </p:txBody>
+      </p:sp>
+    </p:spTree>
+    <p:extLst>
+      <p:ext uri="{BB962C8B-B14F-4D97-AF65-F5344CB8AC3E}">
+        <p14:creationId xmlns:p14="http://schemas.microsoft.com/office/powerpoint/2010/main" val="1575324872"/>
+      </p:ext>
+    </p:extLst>
+  </p:cSld>
+  <p:clrMapOvr>
+    <a:masterClrMapping/>
+  </p:clrMapOvr>
+</p:sld>
+</file>
+
+<file path=ppt/slides/slide15.xml><?xml version="1.0" encoding="utf-8"?>
+<p:sld xmlns:a="http://schemas.openxmlformats.org/drawingml/2006/main" xmlns:r="http://schemas.openxmlformats.org/officeDocument/2006/relationships" xmlns:p="http://schemas.openxmlformats.org/presentationml/2006/main">
+  <p:cSld>
+    <p:spTree>
+      <p:nvGrpSpPr>
+        <p:cNvPr id="1" name=""/>
+        <p:cNvGrpSpPr/>
+        <p:nvPr/>
+      </p:nvGrpSpPr>
+      <p:grpSpPr>
+        <a:xfrm>
+          <a:off x="0" y="0"/>
+          <a:ext cx="0" cy="0"/>
+          <a:chOff x="0" y="0"/>
+          <a:chExt cx="0" cy="0"/>
+        </a:xfrm>
+      </p:grpSpPr>
+      <p:sp>
+        <p:nvSpPr>
+          <p:cNvPr id="2" name="Título 1">
+            <a:extLst>
+              <a:ext uri="{FF2B5EF4-FFF2-40B4-BE49-F238E27FC236}">
+                <a16:creationId xmlns:a16="http://schemas.microsoft.com/office/drawing/2014/main" id="{35258E77-DF0B-CF91-E535-DADBEF0BAE5E}"/>
+              </a:ext>
+            </a:extLst>
+          </p:cNvPr>
+          <p:cNvSpPr>
+            <a:spLocks noGrp="1"/>
+          </p:cNvSpPr>
+          <p:nvPr>
+            <p:ph type="title"/>
+          </p:nvPr>
+        </p:nvSpPr>
+        <p:spPr/>
+        <p:txBody>
+          <a:bodyPr/>
+          <a:lstStyle/>
+          <a:p>
+            <a:endParaRPr lang="pt-BR"/>
+          </a:p>
+        </p:txBody>
+      </p:sp>
+      <p:sp>
+        <p:nvSpPr>
+          <p:cNvPr id="3" name="Espaço Reservado para Conteúdo 2">
+            <a:extLst>
+              <a:ext uri="{FF2B5EF4-FFF2-40B4-BE49-F238E27FC236}">
+                <a16:creationId xmlns:a16="http://schemas.microsoft.com/office/drawing/2014/main" id="{6632A327-F503-E3D4-3DC6-87C87FA2272B}"/>
+              </a:ext>
+            </a:extLst>
+          </p:cNvPr>
+          <p:cNvSpPr>
+            <a:spLocks noGrp="1"/>
+          </p:cNvSpPr>
+          <p:nvPr>
+            <p:ph idx="1"/>
+          </p:nvPr>
+        </p:nvSpPr>
+        <p:spPr/>
+        <p:txBody>
+          <a:bodyPr/>
+          <a:lstStyle/>
+          <a:p>
+            <a:endParaRPr lang="pt-BR"/>
+          </a:p>
+        </p:txBody>
+      </p:sp>
+    </p:spTree>
+    <p:extLst>
+      <p:ext uri="{BB962C8B-B14F-4D97-AF65-F5344CB8AC3E}">
+        <p14:creationId xmlns:p14="http://schemas.microsoft.com/office/powerpoint/2010/main" val="1536213525"/>
       </p:ext>
     </p:extLst>
   </p:cSld>
@@ -8046,18 +8400,18 @@
 </file>
 
 <file path=customXml/item1.xml><?xml version="1.0" encoding="utf-8"?>
-<p:properties xmlns:p="http://schemas.microsoft.com/office/2006/metadata/properties" xmlns:xsi="http://www.w3.org/2001/XMLSchema-instance" xmlns:pc="http://schemas.microsoft.com/office/infopath/2007/PartnerControls">
-  <documentManagement/>
-</p:properties>
-</file>
-
-<file path=customXml/item2.xml><?xml version="1.0" encoding="utf-8"?>
 <?mso-contentType ?>
 <FormTemplates xmlns="http://schemas.microsoft.com/sharepoint/v3/contenttype/forms">
   <Display>DocumentLibraryForm</Display>
   <Edit>DocumentLibraryForm</Edit>
   <New>DocumentLibraryForm</New>
 </FormTemplates>
+</file>
+
+<file path=customXml/item2.xml><?xml version="1.0" encoding="utf-8"?>
+<p:properties xmlns:p="http://schemas.microsoft.com/office/2006/metadata/properties" xmlns:xsi="http://www.w3.org/2001/XMLSchema-instance" xmlns:pc="http://schemas.microsoft.com/office/infopath/2007/PartnerControls">
+  <documentManagement/>
+</p:properties>
 </file>
 
 <file path=customXml/item3.xml><?xml version="1.0" encoding="utf-8"?>
@@ -8223,18 +8577,18 @@
 </file>
 
 <file path=customXml/itemProps1.xml><?xml version="1.0" encoding="utf-8"?>
-<ds:datastoreItem xmlns:ds="http://schemas.openxmlformats.org/officeDocument/2006/customXml" ds:itemID="{44AA641E-A36E-40C4-ABAC-AE8B4CD4DD79}">
+<ds:datastoreItem xmlns:ds="http://schemas.openxmlformats.org/officeDocument/2006/customXml" ds:itemID="{7BA82208-FFF8-4F32-9CA5-4822B26C310B}">
   <ds:schemaRefs>
-    <ds:schemaRef ds:uri="http://schemas.microsoft.com/office/2006/metadata/properties"/>
-    <ds:schemaRef ds:uri="http://schemas.microsoft.com/office/infopath/2007/PartnerControls"/>
+    <ds:schemaRef ds:uri="http://schemas.microsoft.com/sharepoint/v3/contenttype/forms"/>
   </ds:schemaRefs>
 </ds:datastoreItem>
 </file>
 
 <file path=customXml/itemProps2.xml><?xml version="1.0" encoding="utf-8"?>
-<ds:datastoreItem xmlns:ds="http://schemas.openxmlformats.org/officeDocument/2006/customXml" ds:itemID="{7BA82208-FFF8-4F32-9CA5-4822B26C310B}">
+<ds:datastoreItem xmlns:ds="http://schemas.openxmlformats.org/officeDocument/2006/customXml" ds:itemID="{44AA641E-A36E-40C4-ABAC-AE8B4CD4DD79}">
   <ds:schemaRefs>
-    <ds:schemaRef ds:uri="http://schemas.microsoft.com/sharepoint/v3/contenttype/forms"/>
+    <ds:schemaRef ds:uri="http://schemas.microsoft.com/office/2006/metadata/properties"/>
+    <ds:schemaRef ds:uri="http://schemas.microsoft.com/office/infopath/2007/PartnerControls"/>
   </ds:schemaRefs>
 </ds:datastoreItem>
 </file>
